--- a/nbr_composite_figures.pptx
+++ b/nbr_composite_figures.pptx
@@ -6,7 +6,8 @@
   </p:sldMasterIdLst>
   <p:sldIdLst>
     <p:sldId id="256" r:id="rId2"/>
-    <p:sldId id="257" r:id="rId3"/>
+    <p:sldId id="258" r:id="rId3"/>
+    <p:sldId id="257" r:id="rId4"/>
   </p:sldIdLst>
   <p:sldSz cx="12192000" cy="6858000"/>
   <p:notesSz cx="6858000" cy="9144000"/>
@@ -3475,7 +3476,7 @@
         </p:nvSpPr>
         <p:spPr>
           <a:xfrm>
-            <a:off x="2743201" y="11281"/>
+            <a:off x="2586813" y="-75981"/>
             <a:ext cx="7352265" cy="523220"/>
           </a:xfrm>
           <a:prstGeom prst="rect">
@@ -3499,6 +3500,115 @@
             <a:r>
               <a:rPr lang="en-US" sz="2800" b="1" dirty="0"/>
               <a:t> Resonance Reweighting</a:t>
+            </a:r>
+          </a:p>
+        </p:txBody>
+      </p:sp>
+      <p:sp>
+        <p:nvSpPr>
+          <p:cNvPr id="2" name="TextBox 1">
+            <a:extLst>
+              <a:ext uri="{FF2B5EF4-FFF2-40B4-BE49-F238E27FC236}">
+                <a16:creationId xmlns:a16="http://schemas.microsoft.com/office/drawing/2014/main" id="{BD773AEC-82A1-CBC2-EF60-0DAAA386E186}"/>
+              </a:ext>
+            </a:extLst>
+          </p:cNvPr>
+          <p:cNvSpPr txBox="1"/>
+          <p:nvPr/>
+        </p:nvSpPr>
+        <p:spPr>
+          <a:xfrm>
+            <a:off x="9517257" y="221243"/>
+            <a:ext cx="421821" cy="461665"/>
+          </a:xfrm>
+          <a:prstGeom prst="rect">
+            <a:avLst/>
+          </a:prstGeom>
+          <a:noFill/>
+        </p:spPr>
+        <p:txBody>
+          <a:bodyPr wrap="square" rtlCol="0">
+            <a:spAutoFit/>
+          </a:bodyPr>
+          <a:lstStyle/>
+          <a:p>
+            <a:r>
+              <a:rPr lang="en-US" sz="2400" b="1" dirty="0"/>
+              <a:t>2</a:t>
+            </a:r>
+          </a:p>
+        </p:txBody>
+      </p:sp>
+      <p:sp>
+        <p:nvSpPr>
+          <p:cNvPr id="3" name="TextBox 2">
+            <a:extLst>
+              <a:ext uri="{FF2B5EF4-FFF2-40B4-BE49-F238E27FC236}">
+                <a16:creationId xmlns:a16="http://schemas.microsoft.com/office/drawing/2014/main" id="{AD55D66A-CB14-7005-16ED-A8286BED2B7F}"/>
+              </a:ext>
+            </a:extLst>
+          </p:cNvPr>
+          <p:cNvSpPr txBox="1"/>
+          <p:nvPr/>
+        </p:nvSpPr>
+        <p:spPr>
+          <a:xfrm>
+            <a:off x="10066890" y="1108200"/>
+            <a:ext cx="313318" cy="461665"/>
+          </a:xfrm>
+          <a:prstGeom prst="rect">
+            <a:avLst/>
+          </a:prstGeom>
+          <a:noFill/>
+        </p:spPr>
+        <p:txBody>
+          <a:bodyPr wrap="square" rtlCol="0">
+            <a:spAutoFit/>
+          </a:bodyPr>
+          <a:lstStyle/>
+          <a:p>
+            <a:r>
+              <a:rPr lang="en-US" sz="2400" b="1" dirty="0">
+                <a:solidFill>
+                  <a:srgbClr val="C00000"/>
+                </a:solidFill>
+              </a:rPr>
+              <a:t>1</a:t>
+            </a:r>
+          </a:p>
+        </p:txBody>
+      </p:sp>
+      <p:sp>
+        <p:nvSpPr>
+          <p:cNvPr id="4" name="TextBox 3">
+            <a:extLst>
+              <a:ext uri="{FF2B5EF4-FFF2-40B4-BE49-F238E27FC236}">
+                <a16:creationId xmlns:a16="http://schemas.microsoft.com/office/drawing/2014/main" id="{294FF6B3-D6FD-A99F-B64A-EC5D13AE3BFC}"/>
+              </a:ext>
+            </a:extLst>
+          </p:cNvPr>
+          <p:cNvSpPr txBox="1"/>
+          <p:nvPr/>
+        </p:nvSpPr>
+        <p:spPr>
+          <a:xfrm>
+            <a:off x="8237049" y="268895"/>
+            <a:ext cx="313318" cy="461665"/>
+          </a:xfrm>
+          <a:prstGeom prst="rect">
+            <a:avLst/>
+          </a:prstGeom>
+          <a:noFill/>
+        </p:spPr>
+        <p:txBody>
+          <a:bodyPr wrap="square" rtlCol="0">
+            <a:spAutoFit/>
+          </a:bodyPr>
+          <a:lstStyle/>
+          <a:p>
+            <a:r>
+              <a:rPr lang="en-US" sz="2400" b="1" dirty="0"/>
+              <a:t>3</a:t>
             </a:r>
           </a:p>
         </p:txBody>
@@ -3517,6 +3627,645 @@
 </file>
 
 <file path=ppt/slides/slide2.xml><?xml version="1.0" encoding="utf-8"?>
+<p:sld xmlns:a="http://schemas.openxmlformats.org/drawingml/2006/main" xmlns:r="http://schemas.openxmlformats.org/officeDocument/2006/relationships" xmlns:p="http://schemas.openxmlformats.org/presentationml/2006/main">
+  <p:cSld>
+    <p:spTree>
+      <p:nvGrpSpPr>
+        <p:cNvPr id="1" name="">
+          <a:extLst>
+            <a:ext uri="{FF2B5EF4-FFF2-40B4-BE49-F238E27FC236}">
+              <a16:creationId xmlns:a16="http://schemas.microsoft.com/office/drawing/2014/main" id="{D400DD1D-5595-BF39-013E-12C8C5400A0E}"/>
+            </a:ext>
+          </a:extLst>
+        </p:cNvPr>
+        <p:cNvGrpSpPr/>
+        <p:nvPr/>
+      </p:nvGrpSpPr>
+      <p:grpSpPr>
+        <a:xfrm>
+          <a:off x="0" y="0"/>
+          <a:ext cx="0" cy="0"/>
+          <a:chOff x="0" y="0"/>
+          <a:chExt cx="0" cy="0"/>
+        </a:xfrm>
+      </p:grpSpPr>
+      <p:pic>
+        <p:nvPicPr>
+          <p:cNvPr id="5" name="Picture 4">
+            <a:extLst>
+              <a:ext uri="{FF2B5EF4-FFF2-40B4-BE49-F238E27FC236}">
+                <a16:creationId xmlns:a16="http://schemas.microsoft.com/office/drawing/2014/main" id="{C366D344-A4E5-1BAB-5EBF-AD488497F195}"/>
+              </a:ext>
+            </a:extLst>
+          </p:cNvPr>
+          <p:cNvPicPr>
+            <a:picLocks noChangeAspect="1"/>
+          </p:cNvPicPr>
+          <p:nvPr/>
+        </p:nvPicPr>
+        <p:blipFill>
+          <a:blip r:embed="rId2"/>
+          <a:srcRect l="7520" t="19439" r="7232"/>
+          <a:stretch>
+            <a:fillRect/>
+          </a:stretch>
+        </p:blipFill>
+        <p:spPr>
+          <a:xfrm>
+            <a:off x="3894" y="923243"/>
+            <a:ext cx="7743289" cy="5492094"/>
+          </a:xfrm>
+          <a:prstGeom prst="rect">
+            <a:avLst/>
+          </a:prstGeom>
+        </p:spPr>
+      </p:pic>
+      <p:pic>
+        <p:nvPicPr>
+          <p:cNvPr id="7" name="Picture 6">
+            <a:extLst>
+              <a:ext uri="{FF2B5EF4-FFF2-40B4-BE49-F238E27FC236}">
+                <a16:creationId xmlns:a16="http://schemas.microsoft.com/office/drawing/2014/main" id="{9C0D6ADC-538B-9880-F155-5561245DA7EF}"/>
+              </a:ext>
+            </a:extLst>
+          </p:cNvPr>
+          <p:cNvPicPr>
+            <a:picLocks noChangeAspect="1"/>
+          </p:cNvPicPr>
+          <p:nvPr/>
+        </p:nvPicPr>
+        <p:blipFill>
+          <a:blip r:embed="rId3"/>
+          <a:stretch>
+            <a:fillRect/>
+          </a:stretch>
+        </p:blipFill>
+        <p:spPr>
+          <a:xfrm rot="5400000">
+            <a:off x="8320911" y="-20567"/>
+            <a:ext cx="3264913" cy="4114800"/>
+          </a:xfrm>
+          <a:prstGeom prst="rect">
+            <a:avLst/>
+          </a:prstGeom>
+        </p:spPr>
+      </p:pic>
+      <p:pic>
+        <p:nvPicPr>
+          <p:cNvPr id="8" name="Picture 7">
+            <a:extLst>
+              <a:ext uri="{FF2B5EF4-FFF2-40B4-BE49-F238E27FC236}">
+                <a16:creationId xmlns:a16="http://schemas.microsoft.com/office/drawing/2014/main" id="{9922A1CF-F807-8990-F8E3-FFDF6BB3AA5F}"/>
+              </a:ext>
+            </a:extLst>
+          </p:cNvPr>
+          <p:cNvPicPr>
+            <a:picLocks noChangeAspect="1"/>
+          </p:cNvPicPr>
+          <p:nvPr/>
+        </p:nvPicPr>
+        <p:blipFill>
+          <a:blip r:embed="rId4"/>
+          <a:stretch>
+            <a:fillRect/>
+          </a:stretch>
+        </p:blipFill>
+        <p:spPr>
+          <a:xfrm rot="5400000">
+            <a:off x="8320910" y="3168144"/>
+            <a:ext cx="3264913" cy="4114800"/>
+          </a:xfrm>
+          <a:prstGeom prst="rect">
+            <a:avLst/>
+          </a:prstGeom>
+        </p:spPr>
+      </p:pic>
+      <p:cxnSp>
+        <p:nvCxnSpPr>
+          <p:cNvPr id="10" name="Straight Arrow Connector 9">
+            <a:extLst>
+              <a:ext uri="{FF2B5EF4-FFF2-40B4-BE49-F238E27FC236}">
+                <a16:creationId xmlns:a16="http://schemas.microsoft.com/office/drawing/2014/main" id="{40B48B92-EC3B-624B-FAF4-F073C5BA91DE}"/>
+              </a:ext>
+            </a:extLst>
+          </p:cNvPr>
+          <p:cNvCxnSpPr>
+            <a:cxnSpLocks/>
+          </p:cNvCxnSpPr>
+          <p:nvPr/>
+        </p:nvCxnSpPr>
+        <p:spPr>
+          <a:xfrm>
+            <a:off x="9082217" y="2706130"/>
+            <a:ext cx="0" cy="886957"/>
+          </a:xfrm>
+          <a:prstGeom prst="straightConnector1">
+            <a:avLst/>
+          </a:prstGeom>
+          <a:ln w="50800">
+            <a:solidFill>
+              <a:schemeClr val="tx1"/>
+            </a:solidFill>
+            <a:tailEnd type="triangle"/>
+          </a:ln>
+        </p:spPr>
+        <p:style>
+          <a:lnRef idx="2">
+            <a:schemeClr val="accent1"/>
+          </a:lnRef>
+          <a:fillRef idx="0">
+            <a:schemeClr val="accent1"/>
+          </a:fillRef>
+          <a:effectRef idx="1">
+            <a:schemeClr val="accent1"/>
+          </a:effectRef>
+          <a:fontRef idx="minor">
+            <a:schemeClr val="tx1"/>
+          </a:fontRef>
+        </p:style>
+      </p:cxnSp>
+      <p:sp>
+        <p:nvSpPr>
+          <p:cNvPr id="2" name="TextBox 1">
+            <a:extLst>
+              <a:ext uri="{FF2B5EF4-FFF2-40B4-BE49-F238E27FC236}">
+                <a16:creationId xmlns:a16="http://schemas.microsoft.com/office/drawing/2014/main" id="{8C5A4D9C-E469-C3F9-6963-DFB90BA097AE}"/>
+              </a:ext>
+            </a:extLst>
+          </p:cNvPr>
+          <p:cNvSpPr txBox="1"/>
+          <p:nvPr/>
+        </p:nvSpPr>
+        <p:spPr>
+          <a:xfrm>
+            <a:off x="9445817" y="149803"/>
+            <a:ext cx="421821" cy="461665"/>
+          </a:xfrm>
+          <a:prstGeom prst="rect">
+            <a:avLst/>
+          </a:prstGeom>
+          <a:noFill/>
+        </p:spPr>
+        <p:txBody>
+          <a:bodyPr wrap="square" rtlCol="0">
+            <a:spAutoFit/>
+          </a:bodyPr>
+          <a:lstStyle/>
+          <a:p>
+            <a:r>
+              <a:rPr lang="en-US" sz="2400" b="1" dirty="0">
+                <a:solidFill>
+                  <a:srgbClr val="C00000"/>
+                </a:solidFill>
+              </a:rPr>
+              <a:t>2</a:t>
+            </a:r>
+          </a:p>
+        </p:txBody>
+      </p:sp>
+      <p:sp>
+        <p:nvSpPr>
+          <p:cNvPr id="3" name="TextBox 2">
+            <a:extLst>
+              <a:ext uri="{FF2B5EF4-FFF2-40B4-BE49-F238E27FC236}">
+                <a16:creationId xmlns:a16="http://schemas.microsoft.com/office/drawing/2014/main" id="{D0874324-5E99-E760-D572-AE9F0A18299D}"/>
+              </a:ext>
+            </a:extLst>
+          </p:cNvPr>
+          <p:cNvSpPr txBox="1"/>
+          <p:nvPr/>
+        </p:nvSpPr>
+        <p:spPr>
+          <a:xfrm>
+            <a:off x="10066890" y="1108200"/>
+            <a:ext cx="313318" cy="461665"/>
+          </a:xfrm>
+          <a:prstGeom prst="rect">
+            <a:avLst/>
+          </a:prstGeom>
+          <a:noFill/>
+        </p:spPr>
+        <p:txBody>
+          <a:bodyPr wrap="square" rtlCol="0">
+            <a:spAutoFit/>
+          </a:bodyPr>
+          <a:lstStyle/>
+          <a:p>
+            <a:r>
+              <a:rPr lang="en-US" sz="2400" b="1" dirty="0">
+                <a:solidFill>
+                  <a:srgbClr val="C00000"/>
+                </a:solidFill>
+              </a:rPr>
+              <a:t>1</a:t>
+            </a:r>
+          </a:p>
+        </p:txBody>
+      </p:sp>
+      <p:sp>
+        <p:nvSpPr>
+          <p:cNvPr id="4" name="TextBox 3">
+            <a:extLst>
+              <a:ext uri="{FF2B5EF4-FFF2-40B4-BE49-F238E27FC236}">
+                <a16:creationId xmlns:a16="http://schemas.microsoft.com/office/drawing/2014/main" id="{7CECA159-61D5-394D-031F-199E5C59D6CF}"/>
+              </a:ext>
+            </a:extLst>
+          </p:cNvPr>
+          <p:cNvSpPr txBox="1"/>
+          <p:nvPr/>
+        </p:nvSpPr>
+        <p:spPr>
+          <a:xfrm>
+            <a:off x="8351976" y="171024"/>
+            <a:ext cx="313318" cy="461665"/>
+          </a:xfrm>
+          <a:prstGeom prst="rect">
+            <a:avLst/>
+          </a:prstGeom>
+          <a:noFill/>
+        </p:spPr>
+        <p:txBody>
+          <a:bodyPr wrap="square" rtlCol="0">
+            <a:spAutoFit/>
+          </a:bodyPr>
+          <a:lstStyle/>
+          <a:p>
+            <a:r>
+              <a:rPr lang="en-US" sz="2400" b="1" dirty="0">
+                <a:solidFill>
+                  <a:srgbClr val="C00000"/>
+                </a:solidFill>
+              </a:rPr>
+              <a:t>3</a:t>
+            </a:r>
+          </a:p>
+        </p:txBody>
+      </p:sp>
+      <p:sp>
+        <p:nvSpPr>
+          <p:cNvPr id="6" name="TextBox 5">
+            <a:extLst>
+              <a:ext uri="{FF2B5EF4-FFF2-40B4-BE49-F238E27FC236}">
+                <a16:creationId xmlns:a16="http://schemas.microsoft.com/office/drawing/2014/main" id="{8DEFA47D-BC06-49DC-6E25-976BFDDDDEDF}"/>
+              </a:ext>
+            </a:extLst>
+          </p:cNvPr>
+          <p:cNvSpPr txBox="1"/>
+          <p:nvPr/>
+        </p:nvSpPr>
+        <p:spPr>
+          <a:xfrm>
+            <a:off x="7625512" y="1277658"/>
+            <a:ext cx="313318" cy="461665"/>
+          </a:xfrm>
+          <a:prstGeom prst="rect">
+            <a:avLst/>
+          </a:prstGeom>
+          <a:noFill/>
+        </p:spPr>
+        <p:txBody>
+          <a:bodyPr wrap="square" rtlCol="0">
+            <a:spAutoFit/>
+          </a:bodyPr>
+          <a:lstStyle/>
+          <a:p>
+            <a:r>
+              <a:rPr lang="en-US" sz="2400" b="1" dirty="0">
+                <a:solidFill>
+                  <a:srgbClr val="C00000"/>
+                </a:solidFill>
+              </a:rPr>
+              <a:t>4</a:t>
+            </a:r>
+          </a:p>
+        </p:txBody>
+      </p:sp>
+      <p:sp>
+        <p:nvSpPr>
+          <p:cNvPr id="9" name="TextBox 8">
+            <a:extLst>
+              <a:ext uri="{FF2B5EF4-FFF2-40B4-BE49-F238E27FC236}">
+                <a16:creationId xmlns:a16="http://schemas.microsoft.com/office/drawing/2014/main" id="{91D1B414-9E89-93C3-4E07-399AC91A1F31}"/>
+              </a:ext>
+            </a:extLst>
+          </p:cNvPr>
+          <p:cNvSpPr txBox="1"/>
+          <p:nvPr/>
+        </p:nvSpPr>
+        <p:spPr>
+          <a:xfrm>
+            <a:off x="8239110" y="2435373"/>
+            <a:ext cx="313318" cy="461665"/>
+          </a:xfrm>
+          <a:prstGeom prst="rect">
+            <a:avLst/>
+          </a:prstGeom>
+          <a:noFill/>
+        </p:spPr>
+        <p:txBody>
+          <a:bodyPr wrap="square" rtlCol="0">
+            <a:spAutoFit/>
+          </a:bodyPr>
+          <a:lstStyle/>
+          <a:p>
+            <a:r>
+              <a:rPr lang="en-US" sz="2400" b="1" dirty="0">
+                <a:solidFill>
+                  <a:srgbClr val="C00000"/>
+                </a:solidFill>
+              </a:rPr>
+              <a:t>5</a:t>
+            </a:r>
+          </a:p>
+        </p:txBody>
+      </p:sp>
+      <p:sp>
+        <p:nvSpPr>
+          <p:cNvPr id="11" name="TextBox 10">
+            <a:extLst>
+              <a:ext uri="{FF2B5EF4-FFF2-40B4-BE49-F238E27FC236}">
+                <a16:creationId xmlns:a16="http://schemas.microsoft.com/office/drawing/2014/main" id="{DF87C7CF-E780-F939-0CF8-8E073C20D135}"/>
+              </a:ext>
+            </a:extLst>
+          </p:cNvPr>
+          <p:cNvSpPr txBox="1"/>
+          <p:nvPr/>
+        </p:nvSpPr>
+        <p:spPr>
+          <a:xfrm>
+            <a:off x="9343409" y="2435373"/>
+            <a:ext cx="313318" cy="461665"/>
+          </a:xfrm>
+          <a:prstGeom prst="rect">
+            <a:avLst/>
+          </a:prstGeom>
+          <a:noFill/>
+        </p:spPr>
+        <p:txBody>
+          <a:bodyPr wrap="square" rtlCol="0">
+            <a:spAutoFit/>
+          </a:bodyPr>
+          <a:lstStyle/>
+          <a:p>
+            <a:r>
+              <a:rPr lang="en-US" sz="2400" b="1" dirty="0">
+                <a:solidFill>
+                  <a:srgbClr val="C00000"/>
+                </a:solidFill>
+              </a:rPr>
+              <a:t>6</a:t>
+            </a:r>
+          </a:p>
+        </p:txBody>
+      </p:sp>
+      <p:sp>
+        <p:nvSpPr>
+          <p:cNvPr id="14" name="TextBox 13">
+            <a:extLst>
+              <a:ext uri="{FF2B5EF4-FFF2-40B4-BE49-F238E27FC236}">
+                <a16:creationId xmlns:a16="http://schemas.microsoft.com/office/drawing/2014/main" id="{AE795A66-C863-1426-F7EC-C9AEC7EAA02A}"/>
+              </a:ext>
+            </a:extLst>
+          </p:cNvPr>
+          <p:cNvSpPr txBox="1"/>
+          <p:nvPr/>
+        </p:nvSpPr>
+        <p:spPr>
+          <a:xfrm>
+            <a:off x="10066890" y="4219235"/>
+            <a:ext cx="313318" cy="461665"/>
+          </a:xfrm>
+          <a:prstGeom prst="rect">
+            <a:avLst/>
+          </a:prstGeom>
+          <a:noFill/>
+        </p:spPr>
+        <p:txBody>
+          <a:bodyPr wrap="square" rtlCol="0">
+            <a:spAutoFit/>
+          </a:bodyPr>
+          <a:lstStyle/>
+          <a:p>
+            <a:r>
+              <a:rPr lang="en-US" sz="2400" b="1" dirty="0">
+                <a:solidFill>
+                  <a:srgbClr val="C00000"/>
+                </a:solidFill>
+              </a:rPr>
+              <a:t>1</a:t>
+            </a:r>
+          </a:p>
+        </p:txBody>
+      </p:sp>
+      <p:sp>
+        <p:nvSpPr>
+          <p:cNvPr id="15" name="TextBox 14">
+            <a:extLst>
+              <a:ext uri="{FF2B5EF4-FFF2-40B4-BE49-F238E27FC236}">
+                <a16:creationId xmlns:a16="http://schemas.microsoft.com/office/drawing/2014/main" id="{C014A551-255E-65E4-6199-5E83AF7D7946}"/>
+              </a:ext>
+            </a:extLst>
+          </p:cNvPr>
+          <p:cNvSpPr txBox="1"/>
+          <p:nvPr/>
+        </p:nvSpPr>
+        <p:spPr>
+          <a:xfrm>
+            <a:off x="9497945" y="3341033"/>
+            <a:ext cx="421821" cy="461665"/>
+          </a:xfrm>
+          <a:prstGeom prst="rect">
+            <a:avLst/>
+          </a:prstGeom>
+          <a:noFill/>
+        </p:spPr>
+        <p:txBody>
+          <a:bodyPr wrap="square" rtlCol="0">
+            <a:spAutoFit/>
+          </a:bodyPr>
+          <a:lstStyle/>
+          <a:p>
+            <a:r>
+              <a:rPr lang="en-US" sz="2400" b="1" dirty="0">
+                <a:solidFill>
+                  <a:srgbClr val="C00000"/>
+                </a:solidFill>
+              </a:rPr>
+              <a:t>2</a:t>
+            </a:r>
+          </a:p>
+        </p:txBody>
+      </p:sp>
+      <p:sp>
+        <p:nvSpPr>
+          <p:cNvPr id="16" name="TextBox 15">
+            <a:extLst>
+              <a:ext uri="{FF2B5EF4-FFF2-40B4-BE49-F238E27FC236}">
+                <a16:creationId xmlns:a16="http://schemas.microsoft.com/office/drawing/2014/main" id="{1553BD87-DC88-58A4-7E03-DB2FD71DDFA5}"/>
+              </a:ext>
+            </a:extLst>
+          </p:cNvPr>
+          <p:cNvSpPr txBox="1"/>
+          <p:nvPr/>
+        </p:nvSpPr>
+        <p:spPr>
+          <a:xfrm>
+            <a:off x="8346721" y="3331224"/>
+            <a:ext cx="313318" cy="461665"/>
+          </a:xfrm>
+          <a:prstGeom prst="rect">
+            <a:avLst/>
+          </a:prstGeom>
+          <a:noFill/>
+        </p:spPr>
+        <p:txBody>
+          <a:bodyPr wrap="square" rtlCol="0">
+            <a:spAutoFit/>
+          </a:bodyPr>
+          <a:lstStyle/>
+          <a:p>
+            <a:r>
+              <a:rPr lang="en-US" sz="2400" b="1" dirty="0">
+                <a:solidFill>
+                  <a:srgbClr val="C00000"/>
+                </a:solidFill>
+              </a:rPr>
+              <a:t>3</a:t>
+            </a:r>
+          </a:p>
+        </p:txBody>
+      </p:sp>
+      <p:sp>
+        <p:nvSpPr>
+          <p:cNvPr id="17" name="TextBox 16">
+            <a:extLst>
+              <a:ext uri="{FF2B5EF4-FFF2-40B4-BE49-F238E27FC236}">
+                <a16:creationId xmlns:a16="http://schemas.microsoft.com/office/drawing/2014/main" id="{D0288892-D5AC-C974-CFF4-906C5FBF15C3}"/>
+              </a:ext>
+            </a:extLst>
+          </p:cNvPr>
+          <p:cNvSpPr txBox="1"/>
+          <p:nvPr/>
+        </p:nvSpPr>
+        <p:spPr>
+          <a:xfrm>
+            <a:off x="7625512" y="4501232"/>
+            <a:ext cx="313318" cy="461665"/>
+          </a:xfrm>
+          <a:prstGeom prst="rect">
+            <a:avLst/>
+          </a:prstGeom>
+          <a:noFill/>
+        </p:spPr>
+        <p:txBody>
+          <a:bodyPr wrap="square" rtlCol="0">
+            <a:spAutoFit/>
+          </a:bodyPr>
+          <a:lstStyle/>
+          <a:p>
+            <a:r>
+              <a:rPr lang="en-US" sz="2400" b="1" dirty="0">
+                <a:solidFill>
+                  <a:srgbClr val="C00000"/>
+                </a:solidFill>
+              </a:rPr>
+              <a:t>4</a:t>
+            </a:r>
+          </a:p>
+        </p:txBody>
+      </p:sp>
+      <p:sp>
+        <p:nvSpPr>
+          <p:cNvPr id="18" name="TextBox 17">
+            <a:extLst>
+              <a:ext uri="{FF2B5EF4-FFF2-40B4-BE49-F238E27FC236}">
+                <a16:creationId xmlns:a16="http://schemas.microsoft.com/office/drawing/2014/main" id="{625E6B87-2EB1-A057-8D56-62E229E672B2}"/>
+              </a:ext>
+            </a:extLst>
+          </p:cNvPr>
+          <p:cNvSpPr txBox="1"/>
+          <p:nvPr/>
+        </p:nvSpPr>
+        <p:spPr>
+          <a:xfrm>
+            <a:off x="8239110" y="5669827"/>
+            <a:ext cx="313318" cy="461665"/>
+          </a:xfrm>
+          <a:prstGeom prst="rect">
+            <a:avLst/>
+          </a:prstGeom>
+          <a:noFill/>
+        </p:spPr>
+        <p:txBody>
+          <a:bodyPr wrap="square" rtlCol="0">
+            <a:spAutoFit/>
+          </a:bodyPr>
+          <a:lstStyle/>
+          <a:p>
+            <a:r>
+              <a:rPr lang="en-US" sz="2400" b="1" dirty="0">
+                <a:solidFill>
+                  <a:srgbClr val="C00000"/>
+                </a:solidFill>
+              </a:rPr>
+              <a:t>5</a:t>
+            </a:r>
+          </a:p>
+        </p:txBody>
+      </p:sp>
+      <p:sp>
+        <p:nvSpPr>
+          <p:cNvPr id="19" name="TextBox 18">
+            <a:extLst>
+              <a:ext uri="{FF2B5EF4-FFF2-40B4-BE49-F238E27FC236}">
+                <a16:creationId xmlns:a16="http://schemas.microsoft.com/office/drawing/2014/main" id="{9C800DC5-B54C-DD10-D6AF-4056AF34669C}"/>
+              </a:ext>
+            </a:extLst>
+          </p:cNvPr>
+          <p:cNvSpPr txBox="1"/>
+          <p:nvPr/>
+        </p:nvSpPr>
+        <p:spPr>
+          <a:xfrm>
+            <a:off x="9366532" y="5669826"/>
+            <a:ext cx="313318" cy="461665"/>
+          </a:xfrm>
+          <a:prstGeom prst="rect">
+            <a:avLst/>
+          </a:prstGeom>
+          <a:noFill/>
+        </p:spPr>
+        <p:txBody>
+          <a:bodyPr wrap="square" rtlCol="0">
+            <a:spAutoFit/>
+          </a:bodyPr>
+          <a:lstStyle/>
+          <a:p>
+            <a:r>
+              <a:rPr lang="en-US" sz="2400" b="1" dirty="0">
+                <a:solidFill>
+                  <a:srgbClr val="C00000"/>
+                </a:solidFill>
+              </a:rPr>
+              <a:t>6</a:t>
+            </a:r>
+          </a:p>
+        </p:txBody>
+      </p:sp>
+    </p:spTree>
+    <p:extLst>
+      <p:ext uri="{BB962C8B-B14F-4D97-AF65-F5344CB8AC3E}">
+        <p14:creationId xmlns:p14="http://schemas.microsoft.com/office/powerpoint/2010/main" val="843131502"/>
+      </p:ext>
+    </p:extLst>
+  </p:cSld>
+  <p:clrMapOvr>
+    <a:masterClrMapping/>
+  </p:clrMapOvr>
+</p:sld>
+</file>
+
+<file path=ppt/slides/slide3.xml><?xml version="1.0" encoding="utf-8"?>
 <p:sld xmlns:a="http://schemas.openxmlformats.org/drawingml/2006/main" xmlns:r="http://schemas.openxmlformats.org/officeDocument/2006/relationships" xmlns:p="http://schemas.openxmlformats.org/presentationml/2006/main">
   <p:cSld>
     <p:spTree>
@@ -4534,6 +5283,240 @@
           </a:p>
         </p:txBody>
       </p:sp>
+      <p:sp>
+        <p:nvSpPr>
+          <p:cNvPr id="37" name="TextBox 36">
+            <a:extLst>
+              <a:ext uri="{FF2B5EF4-FFF2-40B4-BE49-F238E27FC236}">
+                <a16:creationId xmlns:a16="http://schemas.microsoft.com/office/drawing/2014/main" id="{157B06EE-8912-828C-C4E0-8CBE1CC421F4}"/>
+              </a:ext>
+            </a:extLst>
+          </p:cNvPr>
+          <p:cNvSpPr txBox="1"/>
+          <p:nvPr/>
+        </p:nvSpPr>
+        <p:spPr>
+          <a:xfrm>
+            <a:off x="5029466" y="3036956"/>
+            <a:ext cx="453629" cy="646331"/>
+          </a:xfrm>
+          <a:prstGeom prst="rect">
+            <a:avLst/>
+          </a:prstGeom>
+          <a:noFill/>
+        </p:spPr>
+        <p:txBody>
+          <a:bodyPr wrap="square" rtlCol="0">
+            <a:spAutoFit/>
+          </a:bodyPr>
+          <a:lstStyle/>
+          <a:p>
+            <a:r>
+              <a:rPr lang="en-US" sz="3600" b="1" dirty="0">
+                <a:solidFill>
+                  <a:schemeClr val="bg1"/>
+                </a:solidFill>
+              </a:rPr>
+              <a:t>1</a:t>
+            </a:r>
+          </a:p>
+        </p:txBody>
+      </p:sp>
+      <p:sp>
+        <p:nvSpPr>
+          <p:cNvPr id="38" name="TextBox 37">
+            <a:extLst>
+              <a:ext uri="{FF2B5EF4-FFF2-40B4-BE49-F238E27FC236}">
+                <a16:creationId xmlns:a16="http://schemas.microsoft.com/office/drawing/2014/main" id="{ED96D3EA-5EB1-0E7C-31C7-B880585F2395}"/>
+              </a:ext>
+            </a:extLst>
+          </p:cNvPr>
+          <p:cNvSpPr txBox="1"/>
+          <p:nvPr/>
+        </p:nvSpPr>
+        <p:spPr>
+          <a:xfrm>
+            <a:off x="5797107" y="3360121"/>
+            <a:ext cx="453629" cy="646331"/>
+          </a:xfrm>
+          <a:prstGeom prst="rect">
+            <a:avLst/>
+          </a:prstGeom>
+          <a:noFill/>
+        </p:spPr>
+        <p:txBody>
+          <a:bodyPr wrap="square" rtlCol="0">
+            <a:spAutoFit/>
+          </a:bodyPr>
+          <a:lstStyle/>
+          <a:p>
+            <a:r>
+              <a:rPr lang="en-US" sz="3600" b="1" dirty="0">
+                <a:solidFill>
+                  <a:schemeClr val="bg1"/>
+                </a:solidFill>
+              </a:rPr>
+              <a:t>2</a:t>
+            </a:r>
+          </a:p>
+        </p:txBody>
+      </p:sp>
+      <p:sp>
+        <p:nvSpPr>
+          <p:cNvPr id="39" name="TextBox 38">
+            <a:extLst>
+              <a:ext uri="{FF2B5EF4-FFF2-40B4-BE49-F238E27FC236}">
+                <a16:creationId xmlns:a16="http://schemas.microsoft.com/office/drawing/2014/main" id="{B8FA2DA6-16A1-1C30-E008-AFE3CFA5240F}"/>
+              </a:ext>
+            </a:extLst>
+          </p:cNvPr>
+          <p:cNvSpPr txBox="1"/>
+          <p:nvPr/>
+        </p:nvSpPr>
+        <p:spPr>
+          <a:xfrm>
+            <a:off x="6550284" y="2906195"/>
+            <a:ext cx="453629" cy="646331"/>
+          </a:xfrm>
+          <a:prstGeom prst="rect">
+            <a:avLst/>
+          </a:prstGeom>
+          <a:noFill/>
+        </p:spPr>
+        <p:txBody>
+          <a:bodyPr wrap="square" rtlCol="0">
+            <a:spAutoFit/>
+          </a:bodyPr>
+          <a:lstStyle/>
+          <a:p>
+            <a:r>
+              <a:rPr lang="en-US" sz="3600" b="1" dirty="0">
+                <a:solidFill>
+                  <a:schemeClr val="bg1"/>
+                </a:solidFill>
+              </a:rPr>
+              <a:t>3</a:t>
+            </a:r>
+          </a:p>
+        </p:txBody>
+      </p:sp>
+      <p:sp>
+        <p:nvSpPr>
+          <p:cNvPr id="40" name="TextBox 39">
+            <a:extLst>
+              <a:ext uri="{FF2B5EF4-FFF2-40B4-BE49-F238E27FC236}">
+                <a16:creationId xmlns:a16="http://schemas.microsoft.com/office/drawing/2014/main" id="{B6AC567A-4265-1BF9-C2AC-C26779BC92D1}"/>
+              </a:ext>
+            </a:extLst>
+          </p:cNvPr>
+          <p:cNvSpPr txBox="1"/>
+          <p:nvPr/>
+        </p:nvSpPr>
+        <p:spPr>
+          <a:xfrm>
+            <a:off x="6344274" y="2300251"/>
+            <a:ext cx="453629" cy="646331"/>
+          </a:xfrm>
+          <a:prstGeom prst="rect">
+            <a:avLst/>
+          </a:prstGeom>
+          <a:noFill/>
+        </p:spPr>
+        <p:txBody>
+          <a:bodyPr wrap="square" rtlCol="0">
+            <a:spAutoFit/>
+          </a:bodyPr>
+          <a:lstStyle/>
+          <a:p>
+            <a:r>
+              <a:rPr lang="en-US" sz="3600" b="1" dirty="0">
+                <a:solidFill>
+                  <a:schemeClr val="bg1"/>
+                </a:solidFill>
+              </a:rPr>
+              <a:t>4</a:t>
+            </a:r>
+          </a:p>
+        </p:txBody>
+      </p:sp>
+      <p:sp>
+        <p:nvSpPr>
+          <p:cNvPr id="41" name="TextBox 40">
+            <a:extLst>
+              <a:ext uri="{FF2B5EF4-FFF2-40B4-BE49-F238E27FC236}">
+                <a16:creationId xmlns:a16="http://schemas.microsoft.com/office/drawing/2014/main" id="{E0F3CE73-0B7F-F587-DDCE-DAEFEE74AA5C}"/>
+              </a:ext>
+            </a:extLst>
+          </p:cNvPr>
+          <p:cNvSpPr txBox="1"/>
+          <p:nvPr/>
+        </p:nvSpPr>
+        <p:spPr>
+          <a:xfrm>
+            <a:off x="5631060" y="2100528"/>
+            <a:ext cx="453629" cy="646331"/>
+          </a:xfrm>
+          <a:prstGeom prst="rect">
+            <a:avLst/>
+          </a:prstGeom>
+          <a:noFill/>
+        </p:spPr>
+        <p:txBody>
+          <a:bodyPr wrap="square" rtlCol="0">
+            <a:spAutoFit/>
+          </a:bodyPr>
+          <a:lstStyle/>
+          <a:p>
+            <a:r>
+              <a:rPr lang="en-US" sz="3600" b="1" dirty="0">
+                <a:solidFill>
+                  <a:schemeClr val="bg1"/>
+                </a:solidFill>
+              </a:rPr>
+              <a:t>5</a:t>
+            </a:r>
+          </a:p>
+        </p:txBody>
+      </p:sp>
+      <p:sp>
+        <p:nvSpPr>
+          <p:cNvPr id="42" name="TextBox 41">
+            <a:extLst>
+              <a:ext uri="{FF2B5EF4-FFF2-40B4-BE49-F238E27FC236}">
+                <a16:creationId xmlns:a16="http://schemas.microsoft.com/office/drawing/2014/main" id="{A21D413D-8505-D85C-4FD9-0B2B5AB2BE65}"/>
+              </a:ext>
+            </a:extLst>
+          </p:cNvPr>
+          <p:cNvSpPr txBox="1"/>
+          <p:nvPr/>
+        </p:nvSpPr>
+        <p:spPr>
+          <a:xfrm>
+            <a:off x="4984549" y="2437981"/>
+            <a:ext cx="453629" cy="646331"/>
+          </a:xfrm>
+          <a:prstGeom prst="rect">
+            <a:avLst/>
+          </a:prstGeom>
+          <a:noFill/>
+        </p:spPr>
+        <p:txBody>
+          <a:bodyPr wrap="square" rtlCol="0">
+            <a:spAutoFit/>
+          </a:bodyPr>
+          <a:lstStyle/>
+          <a:p>
+            <a:r>
+              <a:rPr lang="en-US" sz="3600" b="1" dirty="0">
+                <a:solidFill>
+                  <a:schemeClr val="bg1"/>
+                </a:solidFill>
+              </a:rPr>
+              <a:t>6</a:t>
+            </a:r>
+          </a:p>
+        </p:txBody>
+      </p:sp>
     </p:spTree>
     <p:extLst>
       <p:ext uri="{BB962C8B-B14F-4D97-AF65-F5344CB8AC3E}">

--- a/nbr_composite_figures.pptx
+++ b/nbr_composite_figures.pptx
@@ -261,7 +261,7 @@
           <a:p>
             <a:fld id="{C179BDB9-17B2-5345-AD1C-D41C6CB17F17}" type="datetimeFigureOut">
               <a:rPr lang="en-US" smtClean="0"/>
-              <a:t>4/22/26</a:t>
+              <a:t>4/24/26</a:t>
             </a:fld>
             <a:endParaRPr lang="en-US"/>
           </a:p>
@@ -459,7 +459,7 @@
           <a:p>
             <a:fld id="{C179BDB9-17B2-5345-AD1C-D41C6CB17F17}" type="datetimeFigureOut">
               <a:rPr lang="en-US" smtClean="0"/>
-              <a:t>4/22/26</a:t>
+              <a:t>4/24/26</a:t>
             </a:fld>
             <a:endParaRPr lang="en-US"/>
           </a:p>
@@ -667,7 +667,7 @@
           <a:p>
             <a:fld id="{C179BDB9-17B2-5345-AD1C-D41C6CB17F17}" type="datetimeFigureOut">
               <a:rPr lang="en-US" smtClean="0"/>
-              <a:t>4/22/26</a:t>
+              <a:t>4/24/26</a:t>
             </a:fld>
             <a:endParaRPr lang="en-US"/>
           </a:p>
@@ -865,7 +865,7 @@
           <a:p>
             <a:fld id="{C179BDB9-17B2-5345-AD1C-D41C6CB17F17}" type="datetimeFigureOut">
               <a:rPr lang="en-US" smtClean="0"/>
-              <a:t>4/22/26</a:t>
+              <a:t>4/24/26</a:t>
             </a:fld>
             <a:endParaRPr lang="en-US"/>
           </a:p>
@@ -1140,7 +1140,7 @@
           <a:p>
             <a:fld id="{C179BDB9-17B2-5345-AD1C-D41C6CB17F17}" type="datetimeFigureOut">
               <a:rPr lang="en-US" smtClean="0"/>
-              <a:t>4/22/26</a:t>
+              <a:t>4/24/26</a:t>
             </a:fld>
             <a:endParaRPr lang="en-US"/>
           </a:p>
@@ -1405,7 +1405,7 @@
           <a:p>
             <a:fld id="{C179BDB9-17B2-5345-AD1C-D41C6CB17F17}" type="datetimeFigureOut">
               <a:rPr lang="en-US" smtClean="0"/>
-              <a:t>4/22/26</a:t>
+              <a:t>4/24/26</a:t>
             </a:fld>
             <a:endParaRPr lang="en-US"/>
           </a:p>
@@ -1817,7 +1817,7 @@
           <a:p>
             <a:fld id="{C179BDB9-17B2-5345-AD1C-D41C6CB17F17}" type="datetimeFigureOut">
               <a:rPr lang="en-US" smtClean="0"/>
-              <a:t>4/22/26</a:t>
+              <a:t>4/24/26</a:t>
             </a:fld>
             <a:endParaRPr lang="en-US"/>
           </a:p>
@@ -1958,7 +1958,7 @@
           <a:p>
             <a:fld id="{C179BDB9-17B2-5345-AD1C-D41C6CB17F17}" type="datetimeFigureOut">
               <a:rPr lang="en-US" smtClean="0"/>
-              <a:t>4/22/26</a:t>
+              <a:t>4/24/26</a:t>
             </a:fld>
             <a:endParaRPr lang="en-US"/>
           </a:p>
@@ -2071,7 +2071,7 @@
           <a:p>
             <a:fld id="{C179BDB9-17B2-5345-AD1C-D41C6CB17F17}" type="datetimeFigureOut">
               <a:rPr lang="en-US" smtClean="0"/>
-              <a:t>4/22/26</a:t>
+              <a:t>4/24/26</a:t>
             </a:fld>
             <a:endParaRPr lang="en-US"/>
           </a:p>
@@ -2382,7 +2382,7 @@
           <a:p>
             <a:fld id="{C179BDB9-17B2-5345-AD1C-D41C6CB17F17}" type="datetimeFigureOut">
               <a:rPr lang="en-US" smtClean="0"/>
-              <a:t>4/22/26</a:t>
+              <a:t>4/24/26</a:t>
             </a:fld>
             <a:endParaRPr lang="en-US"/>
           </a:p>
@@ -2670,7 +2670,7 @@
           <a:p>
             <a:fld id="{C179BDB9-17B2-5345-AD1C-D41C6CB17F17}" type="datetimeFigureOut">
               <a:rPr lang="en-US" smtClean="0"/>
-              <a:t>4/22/26</a:t>
+              <a:t>4/24/26</a:t>
             </a:fld>
             <a:endParaRPr lang="en-US"/>
           </a:p>
@@ -2911,7 +2911,7 @@
           <a:p>
             <a:fld id="{C179BDB9-17B2-5345-AD1C-D41C6CB17F17}" type="datetimeFigureOut">
               <a:rPr lang="en-US" smtClean="0"/>
-              <a:t>4/22/26</a:t>
+              <a:t>4/24/26</a:t>
             </a:fld>
             <a:endParaRPr lang="en-US"/>
           </a:p>
@@ -4443,8 +4443,8 @@
           </a:fontRef>
         </p:style>
       </p:cxnSp>
-      <mc:AlternateContent xmlns:mc="http://schemas.openxmlformats.org/markup-compatibility/2006">
-        <mc:Choice xmlns:a14="http://schemas.microsoft.com/office/drawing/2010/main" Requires="a14">
+      <mc:AlternateContent xmlns:mc="http://schemas.openxmlformats.org/markup-compatibility/2006" xmlns:a14="http://schemas.microsoft.com/office/drawing/2010/main">
+        <mc:Choice Requires="a14">
           <p:sp>
             <p:nvSpPr>
               <p:cNvPr id="17" name="TextBox 16">
@@ -4473,6 +4473,7 @@
               </a:bodyPr>
               <a:lstStyle/>
               <a:p>
+                <a:pPr/>
                 <a14:m>
                   <m:oMathPara xmlns:m="http://schemas.openxmlformats.org/officeDocument/2006/math">
                     <m:oMathParaPr>
@@ -4505,7 +4506,7 @@
             </p:txBody>
           </p:sp>
         </mc:Choice>
-        <mc:Fallback>
+        <mc:Fallback xmlns="">
           <p:sp>
             <p:nvSpPr>
               <p:cNvPr id="17" name="TextBox 16">
@@ -4550,8 +4551,8 @@
           </p:sp>
         </mc:Fallback>
       </mc:AlternateContent>
-      <mc:AlternateContent xmlns:mc="http://schemas.openxmlformats.org/markup-compatibility/2006">
-        <mc:Choice xmlns:a14="http://schemas.microsoft.com/office/drawing/2010/main" Requires="a14">
+      <mc:AlternateContent xmlns:mc="http://schemas.openxmlformats.org/markup-compatibility/2006" xmlns:a14="http://schemas.microsoft.com/office/drawing/2010/main">
+        <mc:Choice Requires="a14">
           <p:sp>
             <p:nvSpPr>
               <p:cNvPr id="18" name="TextBox 17">
@@ -4580,6 +4581,7 @@
               </a:bodyPr>
               <a:lstStyle/>
               <a:p>
+                <a:pPr/>
                 <a14:m>
                   <m:oMathPara xmlns:m="http://schemas.openxmlformats.org/officeDocument/2006/math">
                     <m:oMathParaPr>
@@ -4612,7 +4614,7 @@
             </p:txBody>
           </p:sp>
         </mc:Choice>
-        <mc:Fallback>
+        <mc:Fallback xmlns="">
           <p:sp>
             <p:nvSpPr>
               <p:cNvPr id="18" name="TextBox 17">
@@ -4657,8 +4659,8 @@
           </p:sp>
         </mc:Fallback>
       </mc:AlternateContent>
-      <mc:AlternateContent xmlns:mc="http://schemas.openxmlformats.org/markup-compatibility/2006">
-        <mc:Choice xmlns:a14="http://schemas.microsoft.com/office/drawing/2010/main" Requires="a14">
+      <mc:AlternateContent xmlns:mc="http://schemas.openxmlformats.org/markup-compatibility/2006" xmlns:a14="http://schemas.microsoft.com/office/drawing/2010/main">
+        <mc:Choice Requires="a14">
           <p:sp>
             <p:nvSpPr>
               <p:cNvPr id="19" name="TextBox 18">
@@ -4687,6 +4689,7 @@
               </a:bodyPr>
               <a:lstStyle/>
               <a:p>
+                <a:pPr/>
                 <a14:m>
                   <m:oMathPara xmlns:m="http://schemas.openxmlformats.org/officeDocument/2006/math">
                     <m:oMathParaPr>
@@ -4719,7 +4722,7 @@
             </p:txBody>
           </p:sp>
         </mc:Choice>
-        <mc:Fallback>
+        <mc:Fallback xmlns="">
           <p:sp>
             <p:nvSpPr>
               <p:cNvPr id="19" name="TextBox 18">
@@ -4808,8 +4811,8 @@
           </a:fontRef>
         </p:style>
       </p:cxnSp>
-      <mc:AlternateContent xmlns:mc="http://schemas.openxmlformats.org/markup-compatibility/2006">
-        <mc:Choice xmlns:a14="http://schemas.microsoft.com/office/drawing/2010/main" Requires="a14">
+      <mc:AlternateContent xmlns:mc="http://schemas.openxmlformats.org/markup-compatibility/2006" xmlns:a14="http://schemas.microsoft.com/office/drawing/2010/main">
+        <mc:Choice Requires="a14">
           <p:sp>
             <p:nvSpPr>
               <p:cNvPr id="28" name="TextBox 27">
@@ -4881,7 +4884,7 @@
             </p:txBody>
           </p:sp>
         </mc:Choice>
-        <mc:Fallback>
+        <mc:Fallback xmlns="">
           <p:sp>
             <p:nvSpPr>
               <p:cNvPr id="28" name="TextBox 27">
@@ -5024,8 +5027,8 @@
           </a:p>
         </p:txBody>
       </p:sp>
-      <mc:AlternateContent xmlns:mc="http://schemas.openxmlformats.org/markup-compatibility/2006">
-        <mc:Choice xmlns:a14="http://schemas.microsoft.com/office/drawing/2010/main" Requires="a14">
+      <mc:AlternateContent xmlns:mc="http://schemas.openxmlformats.org/markup-compatibility/2006" xmlns:a14="http://schemas.microsoft.com/office/drawing/2010/main">
+        <mc:Choice Requires="a14">
           <p:sp>
             <p:nvSpPr>
               <p:cNvPr id="34" name="TextBox 33">
@@ -5082,7 +5085,7 @@
             </p:txBody>
           </p:sp>
         </mc:Choice>
-        <mc:Fallback>
+        <mc:Fallback xmlns="">
           <p:sp>
             <p:nvSpPr>
               <p:cNvPr id="34" name="TextBox 33">
@@ -5127,8 +5130,8 @@
           </p:sp>
         </mc:Fallback>
       </mc:AlternateContent>
-      <mc:AlternateContent xmlns:mc="http://schemas.openxmlformats.org/markup-compatibility/2006">
-        <mc:Choice xmlns:a14="http://schemas.microsoft.com/office/drawing/2010/main" Requires="a14">
+      <mc:AlternateContent xmlns:mc="http://schemas.openxmlformats.org/markup-compatibility/2006" xmlns:a14="http://schemas.microsoft.com/office/drawing/2010/main">
+        <mc:Choice Requires="a14">
           <p:sp>
             <p:nvSpPr>
               <p:cNvPr id="35" name="TextBox 34">
@@ -5185,7 +5188,7 @@
             </p:txBody>
           </p:sp>
         </mc:Choice>
-        <mc:Fallback>
+        <mc:Fallback xmlns="">
           <p:sp>
             <p:nvSpPr>
               <p:cNvPr id="35" name="TextBox 34">

--- a/nbr_composite_figures.pptx
+++ b/nbr_composite_figures.pptx
@@ -7,7 +7,12 @@
   <p:sldIdLst>
     <p:sldId id="256" r:id="rId2"/>
     <p:sldId id="258" r:id="rId3"/>
-    <p:sldId id="257" r:id="rId4"/>
+    <p:sldId id="260" r:id="rId4"/>
+    <p:sldId id="261" r:id="rId5"/>
+    <p:sldId id="262" r:id="rId6"/>
+    <p:sldId id="263" r:id="rId7"/>
+    <p:sldId id="257" r:id="rId8"/>
+    <p:sldId id="259" r:id="rId9"/>
   </p:sldIdLst>
   <p:sldSz cx="12192000" cy="6858000"/>
   <p:notesSz cx="6858000" cy="9144000"/>
@@ -261,7 +266,7 @@
           <a:p>
             <a:fld id="{C179BDB9-17B2-5345-AD1C-D41C6CB17F17}" type="datetimeFigureOut">
               <a:rPr lang="en-US" smtClean="0"/>
-              <a:t>4/24/26</a:t>
+              <a:t>4/26/26</a:t>
             </a:fld>
             <a:endParaRPr lang="en-US"/>
           </a:p>
@@ -459,7 +464,7 @@
           <a:p>
             <a:fld id="{C179BDB9-17B2-5345-AD1C-D41C6CB17F17}" type="datetimeFigureOut">
               <a:rPr lang="en-US" smtClean="0"/>
-              <a:t>4/24/26</a:t>
+              <a:t>4/26/26</a:t>
             </a:fld>
             <a:endParaRPr lang="en-US"/>
           </a:p>
@@ -667,7 +672,7 @@
           <a:p>
             <a:fld id="{C179BDB9-17B2-5345-AD1C-D41C6CB17F17}" type="datetimeFigureOut">
               <a:rPr lang="en-US" smtClean="0"/>
-              <a:t>4/24/26</a:t>
+              <a:t>4/26/26</a:t>
             </a:fld>
             <a:endParaRPr lang="en-US"/>
           </a:p>
@@ -865,7 +870,7 @@
           <a:p>
             <a:fld id="{C179BDB9-17B2-5345-AD1C-D41C6CB17F17}" type="datetimeFigureOut">
               <a:rPr lang="en-US" smtClean="0"/>
-              <a:t>4/24/26</a:t>
+              <a:t>4/26/26</a:t>
             </a:fld>
             <a:endParaRPr lang="en-US"/>
           </a:p>
@@ -1140,7 +1145,7 @@
           <a:p>
             <a:fld id="{C179BDB9-17B2-5345-AD1C-D41C6CB17F17}" type="datetimeFigureOut">
               <a:rPr lang="en-US" smtClean="0"/>
-              <a:t>4/24/26</a:t>
+              <a:t>4/26/26</a:t>
             </a:fld>
             <a:endParaRPr lang="en-US"/>
           </a:p>
@@ -1405,7 +1410,7 @@
           <a:p>
             <a:fld id="{C179BDB9-17B2-5345-AD1C-D41C6CB17F17}" type="datetimeFigureOut">
               <a:rPr lang="en-US" smtClean="0"/>
-              <a:t>4/24/26</a:t>
+              <a:t>4/26/26</a:t>
             </a:fld>
             <a:endParaRPr lang="en-US"/>
           </a:p>
@@ -1817,7 +1822,7 @@
           <a:p>
             <a:fld id="{C179BDB9-17B2-5345-AD1C-D41C6CB17F17}" type="datetimeFigureOut">
               <a:rPr lang="en-US" smtClean="0"/>
-              <a:t>4/24/26</a:t>
+              <a:t>4/26/26</a:t>
             </a:fld>
             <a:endParaRPr lang="en-US"/>
           </a:p>
@@ -1958,7 +1963,7 @@
           <a:p>
             <a:fld id="{C179BDB9-17B2-5345-AD1C-D41C6CB17F17}" type="datetimeFigureOut">
               <a:rPr lang="en-US" smtClean="0"/>
-              <a:t>4/24/26</a:t>
+              <a:t>4/26/26</a:t>
             </a:fld>
             <a:endParaRPr lang="en-US"/>
           </a:p>
@@ -2071,7 +2076,7 @@
           <a:p>
             <a:fld id="{C179BDB9-17B2-5345-AD1C-D41C6CB17F17}" type="datetimeFigureOut">
               <a:rPr lang="en-US" smtClean="0"/>
-              <a:t>4/24/26</a:t>
+              <a:t>4/26/26</a:t>
             </a:fld>
             <a:endParaRPr lang="en-US"/>
           </a:p>
@@ -2382,7 +2387,7 @@
           <a:p>
             <a:fld id="{C179BDB9-17B2-5345-AD1C-D41C6CB17F17}" type="datetimeFigureOut">
               <a:rPr lang="en-US" smtClean="0"/>
-              <a:t>4/24/26</a:t>
+              <a:t>4/26/26</a:t>
             </a:fld>
             <a:endParaRPr lang="en-US"/>
           </a:p>
@@ -2670,7 +2675,7 @@
           <a:p>
             <a:fld id="{C179BDB9-17B2-5345-AD1C-D41C6CB17F17}" type="datetimeFigureOut">
               <a:rPr lang="en-US" smtClean="0"/>
-              <a:t>4/24/26</a:t>
+              <a:t>4/26/26</a:t>
             </a:fld>
             <a:endParaRPr lang="en-US"/>
           </a:p>
@@ -2911,7 +2916,7 @@
           <a:p>
             <a:fld id="{C179BDB9-17B2-5345-AD1C-D41C6CB17F17}" type="datetimeFigureOut">
               <a:rPr lang="en-US" smtClean="0"/>
-              <a:t>4/24/26</a:t>
+              <a:t>4/26/26</a:t>
             </a:fld>
             <a:endParaRPr lang="en-US"/>
           </a:p>
@@ -4266,6 +4271,872 @@
 </file>
 
 <file path=ppt/slides/slide3.xml><?xml version="1.0" encoding="utf-8"?>
+<p:sld xmlns:a="http://schemas.openxmlformats.org/drawingml/2006/main" xmlns:r="http://schemas.openxmlformats.org/officeDocument/2006/relationships" xmlns:p="http://schemas.openxmlformats.org/presentationml/2006/main">
+  <p:cSld>
+    <p:spTree>
+      <p:nvGrpSpPr>
+        <p:cNvPr id="1" name=""/>
+        <p:cNvGrpSpPr/>
+        <p:nvPr/>
+      </p:nvGrpSpPr>
+      <p:grpSpPr>
+        <a:xfrm>
+          <a:off x="0" y="0"/>
+          <a:ext cx="0" cy="0"/>
+          <a:chOff x="0" y="0"/>
+          <a:chExt cx="0" cy="0"/>
+        </a:xfrm>
+      </p:grpSpPr>
+      <p:pic>
+        <p:nvPicPr>
+          <p:cNvPr id="5" name="Picture 4" descr="A black hexagon with a blue line&#10;&#10;AI-generated content may be incorrect.">
+            <a:extLst>
+              <a:ext uri="{FF2B5EF4-FFF2-40B4-BE49-F238E27FC236}">
+                <a16:creationId xmlns:a16="http://schemas.microsoft.com/office/drawing/2014/main" id="{7723C50C-9215-CF50-0DE6-E23F9735D14C}"/>
+              </a:ext>
+            </a:extLst>
+          </p:cNvPr>
+          <p:cNvPicPr>
+            <a:picLocks noChangeAspect="1"/>
+          </p:cNvPicPr>
+          <p:nvPr/>
+        </p:nvPicPr>
+        <p:blipFill>
+          <a:blip r:embed="rId2"/>
+          <a:stretch>
+            <a:fillRect/>
+          </a:stretch>
+        </p:blipFill>
+        <p:spPr>
+          <a:xfrm rot="5400000">
+            <a:off x="7691779" y="3803650"/>
+            <a:ext cx="1993900" cy="4114800"/>
+          </a:xfrm>
+          <a:prstGeom prst="rect">
+            <a:avLst/>
+          </a:prstGeom>
+        </p:spPr>
+      </p:pic>
+      <p:pic>
+        <p:nvPicPr>
+          <p:cNvPr id="6" name="Picture 5">
+            <a:extLst>
+              <a:ext uri="{FF2B5EF4-FFF2-40B4-BE49-F238E27FC236}">
+                <a16:creationId xmlns:a16="http://schemas.microsoft.com/office/drawing/2014/main" id="{65500C26-5E4F-0B4A-FEF4-C4F31661E287}"/>
+              </a:ext>
+            </a:extLst>
+          </p:cNvPr>
+          <p:cNvPicPr>
+            <a:picLocks noChangeAspect="1"/>
+          </p:cNvPicPr>
+          <p:nvPr/>
+        </p:nvPicPr>
+        <p:blipFill>
+          <a:blip r:embed="rId3"/>
+          <a:srcRect/>
+          <a:stretch/>
+        </p:blipFill>
+        <p:spPr>
+          <a:xfrm rot="5400000">
+            <a:off x="7691779" y="1119689"/>
+            <a:ext cx="1993900" cy="4114800"/>
+          </a:xfrm>
+          <a:prstGeom prst="rect">
+            <a:avLst/>
+          </a:prstGeom>
+        </p:spPr>
+      </p:pic>
+      <p:pic>
+        <p:nvPicPr>
+          <p:cNvPr id="7" name="Picture 6">
+            <a:extLst>
+              <a:ext uri="{FF2B5EF4-FFF2-40B4-BE49-F238E27FC236}">
+                <a16:creationId xmlns:a16="http://schemas.microsoft.com/office/drawing/2014/main" id="{61FF198E-A686-A22F-CDB6-3D4D8D533A50}"/>
+              </a:ext>
+            </a:extLst>
+          </p:cNvPr>
+          <p:cNvPicPr>
+            <a:picLocks noChangeAspect="1"/>
+          </p:cNvPicPr>
+          <p:nvPr/>
+        </p:nvPicPr>
+        <p:blipFill>
+          <a:blip r:embed="rId4"/>
+          <a:srcRect/>
+          <a:stretch/>
+        </p:blipFill>
+        <p:spPr>
+          <a:xfrm rot="5400000">
+            <a:off x="7691779" y="-1060450"/>
+            <a:ext cx="1993900" cy="4114800"/>
+          </a:xfrm>
+          <a:prstGeom prst="rect">
+            <a:avLst/>
+          </a:prstGeom>
+        </p:spPr>
+      </p:pic>
+      <p:pic>
+        <p:nvPicPr>
+          <p:cNvPr id="8" name="Picture 7">
+            <a:extLst>
+              <a:ext uri="{FF2B5EF4-FFF2-40B4-BE49-F238E27FC236}">
+                <a16:creationId xmlns:a16="http://schemas.microsoft.com/office/drawing/2014/main" id="{92843E14-5EDE-8104-609F-C887B234555F}"/>
+              </a:ext>
+            </a:extLst>
+          </p:cNvPr>
+          <p:cNvPicPr>
+            <a:picLocks noChangeAspect="1"/>
+          </p:cNvPicPr>
+          <p:nvPr/>
+        </p:nvPicPr>
+        <p:blipFill>
+          <a:blip r:embed="rId5"/>
+          <a:srcRect l="6783" t="20382" r="6916"/>
+          <a:stretch>
+            <a:fillRect/>
+          </a:stretch>
+        </p:blipFill>
+        <p:spPr>
+          <a:xfrm>
+            <a:off x="959005" y="42437"/>
+            <a:ext cx="4114800" cy="2849137"/>
+          </a:xfrm>
+          <a:prstGeom prst="rect">
+            <a:avLst/>
+          </a:prstGeom>
+        </p:spPr>
+      </p:pic>
+      <p:pic>
+        <p:nvPicPr>
+          <p:cNvPr id="10" name="Picture 9">
+            <a:extLst>
+              <a:ext uri="{FF2B5EF4-FFF2-40B4-BE49-F238E27FC236}">
+                <a16:creationId xmlns:a16="http://schemas.microsoft.com/office/drawing/2014/main" id="{48365E3D-C440-269C-31CE-B083F5650833}"/>
+              </a:ext>
+            </a:extLst>
+          </p:cNvPr>
+          <p:cNvPicPr>
+            <a:picLocks noChangeAspect="1"/>
+          </p:cNvPicPr>
+          <p:nvPr/>
+        </p:nvPicPr>
+        <p:blipFill>
+          <a:blip r:embed="rId6"/>
+          <a:srcRect l="8086" t="20382" r="7485"/>
+          <a:stretch>
+            <a:fillRect/>
+          </a:stretch>
+        </p:blipFill>
+        <p:spPr>
+          <a:xfrm>
+            <a:off x="959005" y="3966426"/>
+            <a:ext cx="4025591" cy="2849137"/>
+          </a:xfrm>
+          <a:prstGeom prst="rect">
+            <a:avLst/>
+          </a:prstGeom>
+        </p:spPr>
+      </p:pic>
+      <p:sp>
+        <p:nvSpPr>
+          <p:cNvPr id="11" name="TextBox 10">
+            <a:extLst>
+              <a:ext uri="{FF2B5EF4-FFF2-40B4-BE49-F238E27FC236}">
+                <a16:creationId xmlns:a16="http://schemas.microsoft.com/office/drawing/2014/main" id="{F35B1FE7-F944-1F35-8056-1EA45C7DC46C}"/>
+              </a:ext>
+            </a:extLst>
+          </p:cNvPr>
+          <p:cNvSpPr txBox="1"/>
+          <p:nvPr/>
+        </p:nvSpPr>
+        <p:spPr>
+          <a:xfrm>
+            <a:off x="2537506" y="3410998"/>
+            <a:ext cx="1281185" cy="369332"/>
+          </a:xfrm>
+          <a:prstGeom prst="rect">
+            <a:avLst/>
+          </a:prstGeom>
+          <a:noFill/>
+        </p:spPr>
+        <p:txBody>
+          <a:bodyPr wrap="none" rtlCol="0">
+            <a:spAutoFit/>
+          </a:bodyPr>
+          <a:lstStyle/>
+          <a:p>
+            <a:r>
+              <a:rPr lang="en-US" dirty="0"/>
+              <a:t>Direction A</a:t>
+            </a:r>
+          </a:p>
+        </p:txBody>
+      </p:sp>
+    </p:spTree>
+    <p:extLst>
+      <p:ext uri="{BB962C8B-B14F-4D97-AF65-F5344CB8AC3E}">
+        <p14:creationId xmlns:p14="http://schemas.microsoft.com/office/powerpoint/2010/main" val="3027921099"/>
+      </p:ext>
+    </p:extLst>
+  </p:cSld>
+  <p:clrMapOvr>
+    <a:masterClrMapping/>
+  </p:clrMapOvr>
+</p:sld>
+</file>
+
+<file path=ppt/slides/slide4.xml><?xml version="1.0" encoding="utf-8"?>
+<p:sld xmlns:a="http://schemas.openxmlformats.org/drawingml/2006/main" xmlns:r="http://schemas.openxmlformats.org/officeDocument/2006/relationships" xmlns:p="http://schemas.openxmlformats.org/presentationml/2006/main">
+  <p:cSld>
+    <p:spTree>
+      <p:nvGrpSpPr>
+        <p:cNvPr id="1" name="">
+          <a:extLst>
+            <a:ext uri="{FF2B5EF4-FFF2-40B4-BE49-F238E27FC236}">
+              <a16:creationId xmlns:a16="http://schemas.microsoft.com/office/drawing/2014/main" id="{A28F53CE-FAAB-F52B-B99B-AB15A9890187}"/>
+            </a:ext>
+          </a:extLst>
+        </p:cNvPr>
+        <p:cNvGrpSpPr/>
+        <p:nvPr/>
+      </p:nvGrpSpPr>
+      <p:grpSpPr>
+        <a:xfrm>
+          <a:off x="0" y="0"/>
+          <a:ext cx="0" cy="0"/>
+          <a:chOff x="0" y="0"/>
+          <a:chExt cx="0" cy="0"/>
+        </a:xfrm>
+      </p:grpSpPr>
+      <p:pic>
+        <p:nvPicPr>
+          <p:cNvPr id="5" name="Picture 4" descr="A black hexagon with a blue line&#10;&#10;AI-generated content may be incorrect.">
+            <a:extLst>
+              <a:ext uri="{FF2B5EF4-FFF2-40B4-BE49-F238E27FC236}">
+                <a16:creationId xmlns:a16="http://schemas.microsoft.com/office/drawing/2014/main" id="{7198B9C6-2CFE-F4F2-D4BA-26A35820569C}"/>
+              </a:ext>
+            </a:extLst>
+          </p:cNvPr>
+          <p:cNvPicPr>
+            <a:picLocks noChangeAspect="1"/>
+          </p:cNvPicPr>
+          <p:nvPr/>
+        </p:nvPicPr>
+        <p:blipFill>
+          <a:blip r:embed="rId2"/>
+          <a:stretch>
+            <a:fillRect/>
+          </a:stretch>
+        </p:blipFill>
+        <p:spPr>
+          <a:xfrm rot="5400000">
+            <a:off x="7691779" y="3803650"/>
+            <a:ext cx="1993900" cy="4114800"/>
+          </a:xfrm>
+          <a:prstGeom prst="rect">
+            <a:avLst/>
+          </a:prstGeom>
+        </p:spPr>
+      </p:pic>
+      <p:pic>
+        <p:nvPicPr>
+          <p:cNvPr id="6" name="Picture 5">
+            <a:extLst>
+              <a:ext uri="{FF2B5EF4-FFF2-40B4-BE49-F238E27FC236}">
+                <a16:creationId xmlns:a16="http://schemas.microsoft.com/office/drawing/2014/main" id="{1434E6AE-8971-7636-E6DE-F4163752F70F}"/>
+              </a:ext>
+            </a:extLst>
+          </p:cNvPr>
+          <p:cNvPicPr>
+            <a:picLocks noChangeAspect="1"/>
+          </p:cNvPicPr>
+          <p:nvPr/>
+        </p:nvPicPr>
+        <p:blipFill>
+          <a:blip r:embed="rId3"/>
+          <a:srcRect/>
+          <a:stretch/>
+        </p:blipFill>
+        <p:spPr>
+          <a:xfrm rot="5400000">
+            <a:off x="7691779" y="1119689"/>
+            <a:ext cx="1993900" cy="4114800"/>
+          </a:xfrm>
+          <a:prstGeom prst="rect">
+            <a:avLst/>
+          </a:prstGeom>
+        </p:spPr>
+      </p:pic>
+      <p:pic>
+        <p:nvPicPr>
+          <p:cNvPr id="7" name="Picture 6">
+            <a:extLst>
+              <a:ext uri="{FF2B5EF4-FFF2-40B4-BE49-F238E27FC236}">
+                <a16:creationId xmlns:a16="http://schemas.microsoft.com/office/drawing/2014/main" id="{41A1CD56-59A6-87A6-38C0-20C3DEDE5210}"/>
+              </a:ext>
+            </a:extLst>
+          </p:cNvPr>
+          <p:cNvPicPr>
+            <a:picLocks noChangeAspect="1"/>
+          </p:cNvPicPr>
+          <p:nvPr/>
+        </p:nvPicPr>
+        <p:blipFill>
+          <a:blip r:embed="rId4"/>
+          <a:srcRect/>
+          <a:stretch/>
+        </p:blipFill>
+        <p:spPr>
+          <a:xfrm rot="5400000">
+            <a:off x="7691779" y="-1060450"/>
+            <a:ext cx="1993900" cy="4114800"/>
+          </a:xfrm>
+          <a:prstGeom prst="rect">
+            <a:avLst/>
+          </a:prstGeom>
+        </p:spPr>
+      </p:pic>
+      <p:pic>
+        <p:nvPicPr>
+          <p:cNvPr id="8" name="Picture 7">
+            <a:extLst>
+              <a:ext uri="{FF2B5EF4-FFF2-40B4-BE49-F238E27FC236}">
+                <a16:creationId xmlns:a16="http://schemas.microsoft.com/office/drawing/2014/main" id="{B6FB1782-18DC-5884-5B3E-B1F64EEBE256}"/>
+              </a:ext>
+            </a:extLst>
+          </p:cNvPr>
+          <p:cNvPicPr>
+            <a:picLocks noChangeAspect="1"/>
+          </p:cNvPicPr>
+          <p:nvPr/>
+        </p:nvPicPr>
+        <p:blipFill>
+          <a:blip r:embed="rId5"/>
+          <a:srcRect l="6783" t="20382" r="6916"/>
+          <a:stretch>
+            <a:fillRect/>
+          </a:stretch>
+        </p:blipFill>
+        <p:spPr>
+          <a:xfrm>
+            <a:off x="959005" y="42437"/>
+            <a:ext cx="4114800" cy="2849137"/>
+          </a:xfrm>
+          <a:prstGeom prst="rect">
+            <a:avLst/>
+          </a:prstGeom>
+        </p:spPr>
+      </p:pic>
+      <p:pic>
+        <p:nvPicPr>
+          <p:cNvPr id="10" name="Picture 9">
+            <a:extLst>
+              <a:ext uri="{FF2B5EF4-FFF2-40B4-BE49-F238E27FC236}">
+                <a16:creationId xmlns:a16="http://schemas.microsoft.com/office/drawing/2014/main" id="{D79CC314-5EAC-9FDA-EF4B-D5835BAED15B}"/>
+              </a:ext>
+            </a:extLst>
+          </p:cNvPr>
+          <p:cNvPicPr>
+            <a:picLocks noChangeAspect="1"/>
+          </p:cNvPicPr>
+          <p:nvPr/>
+        </p:nvPicPr>
+        <p:blipFill>
+          <a:blip r:embed="rId6"/>
+          <a:srcRect t="2850" b="2850"/>
+          <a:stretch/>
+        </p:blipFill>
+        <p:spPr>
+          <a:xfrm>
+            <a:off x="401445" y="3204967"/>
+            <a:ext cx="4988116" cy="3530370"/>
+          </a:xfrm>
+          <a:prstGeom prst="rect">
+            <a:avLst/>
+          </a:prstGeom>
+        </p:spPr>
+      </p:pic>
+      <p:sp>
+        <p:nvSpPr>
+          <p:cNvPr id="11" name="TextBox 10">
+            <a:extLst>
+              <a:ext uri="{FF2B5EF4-FFF2-40B4-BE49-F238E27FC236}">
+                <a16:creationId xmlns:a16="http://schemas.microsoft.com/office/drawing/2014/main" id="{2778F93D-ADC8-5629-49E8-B66931CBD685}"/>
+              </a:ext>
+            </a:extLst>
+          </p:cNvPr>
+          <p:cNvSpPr txBox="1"/>
+          <p:nvPr/>
+        </p:nvSpPr>
+        <p:spPr>
+          <a:xfrm>
+            <a:off x="2375812" y="3204967"/>
+            <a:ext cx="1303627" cy="369332"/>
+          </a:xfrm>
+          <a:prstGeom prst="rect">
+            <a:avLst/>
+          </a:prstGeom>
+          <a:noFill/>
+        </p:spPr>
+        <p:txBody>
+          <a:bodyPr wrap="none" rtlCol="0">
+            <a:spAutoFit/>
+          </a:bodyPr>
+          <a:lstStyle/>
+          <a:p>
+            <a:r>
+              <a:rPr lang="en-US" dirty="0"/>
+              <a:t>Direction D</a:t>
+            </a:r>
+          </a:p>
+        </p:txBody>
+      </p:sp>
+    </p:spTree>
+    <p:extLst>
+      <p:ext uri="{BB962C8B-B14F-4D97-AF65-F5344CB8AC3E}">
+        <p14:creationId xmlns:p14="http://schemas.microsoft.com/office/powerpoint/2010/main" val="1846191413"/>
+      </p:ext>
+    </p:extLst>
+  </p:cSld>
+  <p:clrMapOvr>
+    <a:masterClrMapping/>
+  </p:clrMapOvr>
+</p:sld>
+</file>
+
+<file path=ppt/slides/slide5.xml><?xml version="1.0" encoding="utf-8"?>
+<p:sld xmlns:a="http://schemas.openxmlformats.org/drawingml/2006/main" xmlns:r="http://schemas.openxmlformats.org/officeDocument/2006/relationships" xmlns:p="http://schemas.openxmlformats.org/presentationml/2006/main">
+  <p:cSld>
+    <p:spTree>
+      <p:nvGrpSpPr>
+        <p:cNvPr id="1" name="">
+          <a:extLst>
+            <a:ext uri="{FF2B5EF4-FFF2-40B4-BE49-F238E27FC236}">
+              <a16:creationId xmlns:a16="http://schemas.microsoft.com/office/drawing/2014/main" id="{D0D152BA-B488-F686-35A6-D193E0F57C46}"/>
+            </a:ext>
+          </a:extLst>
+        </p:cNvPr>
+        <p:cNvGrpSpPr/>
+        <p:nvPr/>
+      </p:nvGrpSpPr>
+      <p:grpSpPr>
+        <a:xfrm>
+          <a:off x="0" y="0"/>
+          <a:ext cx="0" cy="0"/>
+          <a:chOff x="0" y="0"/>
+          <a:chExt cx="0" cy="0"/>
+        </a:xfrm>
+      </p:grpSpPr>
+      <p:pic>
+        <p:nvPicPr>
+          <p:cNvPr id="5" name="Picture 4">
+            <a:extLst>
+              <a:ext uri="{FF2B5EF4-FFF2-40B4-BE49-F238E27FC236}">
+                <a16:creationId xmlns:a16="http://schemas.microsoft.com/office/drawing/2014/main" id="{8BFA0E46-DC9A-7FCA-D5BD-695C69B7CB07}"/>
+              </a:ext>
+            </a:extLst>
+          </p:cNvPr>
+          <p:cNvPicPr>
+            <a:picLocks noChangeAspect="1"/>
+          </p:cNvPicPr>
+          <p:nvPr/>
+        </p:nvPicPr>
+        <p:blipFill>
+          <a:blip r:embed="rId2"/>
+          <a:srcRect/>
+          <a:stretch/>
+        </p:blipFill>
+        <p:spPr>
+          <a:xfrm rot="5400000">
+            <a:off x="7691779" y="4513133"/>
+            <a:ext cx="1993900" cy="2695834"/>
+          </a:xfrm>
+          <a:prstGeom prst="rect">
+            <a:avLst/>
+          </a:prstGeom>
+        </p:spPr>
+      </p:pic>
+      <p:pic>
+        <p:nvPicPr>
+          <p:cNvPr id="6" name="Picture 5">
+            <a:extLst>
+              <a:ext uri="{FF2B5EF4-FFF2-40B4-BE49-F238E27FC236}">
+                <a16:creationId xmlns:a16="http://schemas.microsoft.com/office/drawing/2014/main" id="{6E876575-8AB0-49B1-401C-B2310AFE6E7B}"/>
+              </a:ext>
+            </a:extLst>
+          </p:cNvPr>
+          <p:cNvPicPr>
+            <a:picLocks noChangeAspect="1"/>
+          </p:cNvPicPr>
+          <p:nvPr/>
+        </p:nvPicPr>
+        <p:blipFill>
+          <a:blip r:embed="rId3"/>
+          <a:srcRect/>
+          <a:stretch/>
+        </p:blipFill>
+        <p:spPr>
+          <a:xfrm rot="5400000">
+            <a:off x="7691779" y="1829172"/>
+            <a:ext cx="1993900" cy="2695834"/>
+          </a:xfrm>
+          <a:prstGeom prst="rect">
+            <a:avLst/>
+          </a:prstGeom>
+        </p:spPr>
+      </p:pic>
+      <p:pic>
+        <p:nvPicPr>
+          <p:cNvPr id="7" name="Picture 6">
+            <a:extLst>
+              <a:ext uri="{FF2B5EF4-FFF2-40B4-BE49-F238E27FC236}">
+                <a16:creationId xmlns:a16="http://schemas.microsoft.com/office/drawing/2014/main" id="{59A4DEE0-4086-F4B6-2E90-A33B95DFF2C3}"/>
+              </a:ext>
+            </a:extLst>
+          </p:cNvPr>
+          <p:cNvPicPr>
+            <a:picLocks noChangeAspect="1"/>
+          </p:cNvPicPr>
+          <p:nvPr/>
+        </p:nvPicPr>
+        <p:blipFill>
+          <a:blip r:embed="rId4"/>
+          <a:srcRect/>
+          <a:stretch/>
+        </p:blipFill>
+        <p:spPr>
+          <a:xfrm rot="5400000">
+            <a:off x="7691779" y="-350967"/>
+            <a:ext cx="1993900" cy="2695834"/>
+          </a:xfrm>
+          <a:prstGeom prst="rect">
+            <a:avLst/>
+          </a:prstGeom>
+        </p:spPr>
+      </p:pic>
+      <p:pic>
+        <p:nvPicPr>
+          <p:cNvPr id="8" name="Picture 7">
+            <a:extLst>
+              <a:ext uri="{FF2B5EF4-FFF2-40B4-BE49-F238E27FC236}">
+                <a16:creationId xmlns:a16="http://schemas.microsoft.com/office/drawing/2014/main" id="{686E5D15-7102-2CDC-5C14-C65EA167AAC8}"/>
+              </a:ext>
+            </a:extLst>
+          </p:cNvPr>
+          <p:cNvPicPr>
+            <a:picLocks noChangeAspect="1"/>
+          </p:cNvPicPr>
+          <p:nvPr/>
+        </p:nvPicPr>
+        <p:blipFill>
+          <a:blip r:embed="rId5"/>
+          <a:srcRect t="3873" b="3873"/>
+          <a:stretch/>
+        </p:blipFill>
+        <p:spPr>
+          <a:xfrm>
+            <a:off x="959005" y="42437"/>
+            <a:ext cx="4114800" cy="2849137"/>
+          </a:xfrm>
+          <a:prstGeom prst="rect">
+            <a:avLst/>
+          </a:prstGeom>
+        </p:spPr>
+      </p:pic>
+      <p:pic>
+        <p:nvPicPr>
+          <p:cNvPr id="10" name="Picture 9">
+            <a:extLst>
+              <a:ext uri="{FF2B5EF4-FFF2-40B4-BE49-F238E27FC236}">
+                <a16:creationId xmlns:a16="http://schemas.microsoft.com/office/drawing/2014/main" id="{9475CD42-90FE-C276-BD39-5176EEDA33F0}"/>
+              </a:ext>
+            </a:extLst>
+          </p:cNvPr>
+          <p:cNvPicPr>
+            <a:picLocks noChangeAspect="1"/>
+          </p:cNvPicPr>
+          <p:nvPr/>
+        </p:nvPicPr>
+        <p:blipFill>
+          <a:blip r:embed="rId6"/>
+          <a:srcRect t="2850" b="2850"/>
+          <a:stretch/>
+        </p:blipFill>
+        <p:spPr>
+          <a:xfrm>
+            <a:off x="401445" y="3204967"/>
+            <a:ext cx="4988116" cy="3530370"/>
+          </a:xfrm>
+          <a:prstGeom prst="rect">
+            <a:avLst/>
+          </a:prstGeom>
+        </p:spPr>
+      </p:pic>
+      <p:sp>
+        <p:nvSpPr>
+          <p:cNvPr id="11" name="TextBox 10">
+            <a:extLst>
+              <a:ext uri="{FF2B5EF4-FFF2-40B4-BE49-F238E27FC236}">
+                <a16:creationId xmlns:a16="http://schemas.microsoft.com/office/drawing/2014/main" id="{4F441479-EFD0-1FC8-340B-95AEA3699AB0}"/>
+              </a:ext>
+            </a:extLst>
+          </p:cNvPr>
+          <p:cNvSpPr txBox="1"/>
+          <p:nvPr/>
+        </p:nvSpPr>
+        <p:spPr>
+          <a:xfrm>
+            <a:off x="2375812" y="3204967"/>
+            <a:ext cx="1281185" cy="369332"/>
+          </a:xfrm>
+          <a:prstGeom prst="rect">
+            <a:avLst/>
+          </a:prstGeom>
+          <a:noFill/>
+        </p:spPr>
+        <p:txBody>
+          <a:bodyPr wrap="none" rtlCol="0">
+            <a:spAutoFit/>
+          </a:bodyPr>
+          <a:lstStyle/>
+          <a:p>
+            <a:r>
+              <a:rPr lang="en-US" dirty="0"/>
+              <a:t>Direction A</a:t>
+            </a:r>
+          </a:p>
+        </p:txBody>
+      </p:sp>
+    </p:spTree>
+    <p:extLst>
+      <p:ext uri="{BB962C8B-B14F-4D97-AF65-F5344CB8AC3E}">
+        <p14:creationId xmlns:p14="http://schemas.microsoft.com/office/powerpoint/2010/main" val="1171590"/>
+      </p:ext>
+    </p:extLst>
+  </p:cSld>
+  <p:clrMapOvr>
+    <a:masterClrMapping/>
+  </p:clrMapOvr>
+</p:sld>
+</file>
+
+<file path=ppt/slides/slide6.xml><?xml version="1.0" encoding="utf-8"?>
+<p:sld xmlns:a="http://schemas.openxmlformats.org/drawingml/2006/main" xmlns:r="http://schemas.openxmlformats.org/officeDocument/2006/relationships" xmlns:p="http://schemas.openxmlformats.org/presentationml/2006/main">
+  <p:cSld>
+    <p:spTree>
+      <p:nvGrpSpPr>
+        <p:cNvPr id="1" name="">
+          <a:extLst>
+            <a:ext uri="{FF2B5EF4-FFF2-40B4-BE49-F238E27FC236}">
+              <a16:creationId xmlns:a16="http://schemas.microsoft.com/office/drawing/2014/main" id="{7464F269-10FD-9614-7754-E2EDCF5A9A42}"/>
+            </a:ext>
+          </a:extLst>
+        </p:cNvPr>
+        <p:cNvGrpSpPr/>
+        <p:nvPr/>
+      </p:nvGrpSpPr>
+      <p:grpSpPr>
+        <a:xfrm>
+          <a:off x="0" y="0"/>
+          <a:ext cx="0" cy="0"/>
+          <a:chOff x="0" y="0"/>
+          <a:chExt cx="0" cy="0"/>
+        </a:xfrm>
+      </p:grpSpPr>
+      <p:pic>
+        <p:nvPicPr>
+          <p:cNvPr id="5" name="Picture 4">
+            <a:extLst>
+              <a:ext uri="{FF2B5EF4-FFF2-40B4-BE49-F238E27FC236}">
+                <a16:creationId xmlns:a16="http://schemas.microsoft.com/office/drawing/2014/main" id="{0B5BECB8-AFC8-1BA9-B4C4-5DC157C637AC}"/>
+              </a:ext>
+            </a:extLst>
+          </p:cNvPr>
+          <p:cNvPicPr>
+            <a:picLocks noChangeAspect="1"/>
+          </p:cNvPicPr>
+          <p:nvPr/>
+        </p:nvPicPr>
+        <p:blipFill>
+          <a:blip r:embed="rId2"/>
+          <a:srcRect/>
+          <a:stretch/>
+        </p:blipFill>
+        <p:spPr>
+          <a:xfrm rot="5400000">
+            <a:off x="7691779" y="4513133"/>
+            <a:ext cx="1993900" cy="2695834"/>
+          </a:xfrm>
+          <a:prstGeom prst="rect">
+            <a:avLst/>
+          </a:prstGeom>
+        </p:spPr>
+      </p:pic>
+      <p:pic>
+        <p:nvPicPr>
+          <p:cNvPr id="6" name="Picture 5">
+            <a:extLst>
+              <a:ext uri="{FF2B5EF4-FFF2-40B4-BE49-F238E27FC236}">
+                <a16:creationId xmlns:a16="http://schemas.microsoft.com/office/drawing/2014/main" id="{385A87A1-6EF5-5C58-6F16-C40BDB91C306}"/>
+              </a:ext>
+            </a:extLst>
+          </p:cNvPr>
+          <p:cNvPicPr>
+            <a:picLocks noChangeAspect="1"/>
+          </p:cNvPicPr>
+          <p:nvPr/>
+        </p:nvPicPr>
+        <p:blipFill>
+          <a:blip r:embed="rId3"/>
+          <a:srcRect/>
+          <a:stretch/>
+        </p:blipFill>
+        <p:spPr>
+          <a:xfrm rot="5400000">
+            <a:off x="7691779" y="1829172"/>
+            <a:ext cx="1993900" cy="2695834"/>
+          </a:xfrm>
+          <a:prstGeom prst="rect">
+            <a:avLst/>
+          </a:prstGeom>
+        </p:spPr>
+      </p:pic>
+      <p:pic>
+        <p:nvPicPr>
+          <p:cNvPr id="7" name="Picture 6">
+            <a:extLst>
+              <a:ext uri="{FF2B5EF4-FFF2-40B4-BE49-F238E27FC236}">
+                <a16:creationId xmlns:a16="http://schemas.microsoft.com/office/drawing/2014/main" id="{AAE578B4-F306-AE51-8A2B-0D1B829F4579}"/>
+              </a:ext>
+            </a:extLst>
+          </p:cNvPr>
+          <p:cNvPicPr>
+            <a:picLocks noChangeAspect="1"/>
+          </p:cNvPicPr>
+          <p:nvPr/>
+        </p:nvPicPr>
+        <p:blipFill>
+          <a:blip r:embed="rId4"/>
+          <a:srcRect/>
+          <a:stretch/>
+        </p:blipFill>
+        <p:spPr>
+          <a:xfrm rot="5400000">
+            <a:off x="7691779" y="-350967"/>
+            <a:ext cx="1993900" cy="2695834"/>
+          </a:xfrm>
+          <a:prstGeom prst="rect">
+            <a:avLst/>
+          </a:prstGeom>
+        </p:spPr>
+      </p:pic>
+      <p:pic>
+        <p:nvPicPr>
+          <p:cNvPr id="8" name="Picture 7">
+            <a:extLst>
+              <a:ext uri="{FF2B5EF4-FFF2-40B4-BE49-F238E27FC236}">
+                <a16:creationId xmlns:a16="http://schemas.microsoft.com/office/drawing/2014/main" id="{C26F50D8-A84F-9D9A-D525-007D5A140A30}"/>
+              </a:ext>
+            </a:extLst>
+          </p:cNvPr>
+          <p:cNvPicPr>
+            <a:picLocks noChangeAspect="1"/>
+          </p:cNvPicPr>
+          <p:nvPr/>
+        </p:nvPicPr>
+        <p:blipFill>
+          <a:blip r:embed="rId5"/>
+          <a:srcRect t="3873" b="3873"/>
+          <a:stretch/>
+        </p:blipFill>
+        <p:spPr>
+          <a:xfrm>
+            <a:off x="818983" y="42437"/>
+            <a:ext cx="4254822" cy="2946090"/>
+          </a:xfrm>
+          <a:prstGeom prst="rect">
+            <a:avLst/>
+          </a:prstGeom>
+        </p:spPr>
+      </p:pic>
+      <p:pic>
+        <p:nvPicPr>
+          <p:cNvPr id="10" name="Picture 9">
+            <a:extLst>
+              <a:ext uri="{FF2B5EF4-FFF2-40B4-BE49-F238E27FC236}">
+                <a16:creationId xmlns:a16="http://schemas.microsoft.com/office/drawing/2014/main" id="{8203A23C-8752-CEC9-2364-AB321B08FBF7}"/>
+              </a:ext>
+            </a:extLst>
+          </p:cNvPr>
+          <p:cNvPicPr>
+            <a:picLocks noChangeAspect="1"/>
+          </p:cNvPicPr>
+          <p:nvPr/>
+        </p:nvPicPr>
+        <p:blipFill>
+          <a:blip r:embed="rId6"/>
+          <a:srcRect t="2850" b="2850"/>
+          <a:stretch/>
+        </p:blipFill>
+        <p:spPr>
+          <a:xfrm>
+            <a:off x="401445" y="3204967"/>
+            <a:ext cx="4988116" cy="3530370"/>
+          </a:xfrm>
+          <a:prstGeom prst="rect">
+            <a:avLst/>
+          </a:prstGeom>
+        </p:spPr>
+      </p:pic>
+      <p:sp>
+        <p:nvSpPr>
+          <p:cNvPr id="11" name="TextBox 10">
+            <a:extLst>
+              <a:ext uri="{FF2B5EF4-FFF2-40B4-BE49-F238E27FC236}">
+                <a16:creationId xmlns:a16="http://schemas.microsoft.com/office/drawing/2014/main" id="{7E88B448-9543-51BF-CFE3-52C323AD617D}"/>
+              </a:ext>
+            </a:extLst>
+          </p:cNvPr>
+          <p:cNvSpPr txBox="1"/>
+          <p:nvPr/>
+        </p:nvSpPr>
+        <p:spPr>
+          <a:xfrm>
+            <a:off x="2375812" y="3204967"/>
+            <a:ext cx="1303627" cy="369332"/>
+          </a:xfrm>
+          <a:prstGeom prst="rect">
+            <a:avLst/>
+          </a:prstGeom>
+          <a:noFill/>
+        </p:spPr>
+        <p:txBody>
+          <a:bodyPr wrap="none" rtlCol="0">
+            <a:spAutoFit/>
+          </a:bodyPr>
+          <a:lstStyle/>
+          <a:p>
+            <a:r>
+              <a:rPr lang="en-US" dirty="0"/>
+              <a:t>Direction D</a:t>
+            </a:r>
+          </a:p>
+        </p:txBody>
+      </p:sp>
+    </p:spTree>
+    <p:extLst>
+      <p:ext uri="{BB962C8B-B14F-4D97-AF65-F5344CB8AC3E}">
+        <p14:creationId xmlns:p14="http://schemas.microsoft.com/office/powerpoint/2010/main" val="2211820564"/>
+      </p:ext>
+    </p:extLst>
+  </p:cSld>
+  <p:clrMapOvr>
+    <a:masterClrMapping/>
+  </p:clrMapOvr>
+</p:sld>
+</file>
+
+<file path=ppt/slides/slide7.xml><?xml version="1.0" encoding="utf-8"?>
 <p:sld xmlns:a="http://schemas.openxmlformats.org/drawingml/2006/main" xmlns:r="http://schemas.openxmlformats.org/officeDocument/2006/relationships" xmlns:p="http://schemas.openxmlformats.org/presentationml/2006/main">
   <p:cSld>
     <p:spTree>
@@ -5533,6 +6404,36 @@
 </p:sld>
 </file>
 
+<file path=ppt/slides/slide8.xml><?xml version="1.0" encoding="utf-8"?>
+<p:sld xmlns:a="http://schemas.openxmlformats.org/drawingml/2006/main" xmlns:r="http://schemas.openxmlformats.org/officeDocument/2006/relationships" xmlns:p="http://schemas.openxmlformats.org/presentationml/2006/main">
+  <p:cSld>
+    <p:spTree>
+      <p:nvGrpSpPr>
+        <p:cNvPr id="1" name=""/>
+        <p:cNvGrpSpPr/>
+        <p:nvPr/>
+      </p:nvGrpSpPr>
+      <p:grpSpPr>
+        <a:xfrm>
+          <a:off x="0" y="0"/>
+          <a:ext cx="0" cy="0"/>
+          <a:chOff x="0" y="0"/>
+          <a:chExt cx="0" cy="0"/>
+        </a:xfrm>
+      </p:grpSpPr>
+    </p:spTree>
+    <p:extLst>
+      <p:ext uri="{BB962C8B-B14F-4D97-AF65-F5344CB8AC3E}">
+        <p14:creationId xmlns:p14="http://schemas.microsoft.com/office/powerpoint/2010/main" val="1473110578"/>
+      </p:ext>
+    </p:extLst>
+  </p:cSld>
+  <p:clrMapOvr>
+    <a:masterClrMapping/>
+  </p:clrMapOvr>
+</p:sld>
+</file>
+
 <file path=ppt/theme/theme1.xml><?xml version="1.0" encoding="utf-8"?>
 <a:theme xmlns:a="http://schemas.openxmlformats.org/drawingml/2006/main" name="Office Theme">
   <a:themeElements>

--- a/nbr_composite_figures.pptx
+++ b/nbr_composite_figures.pptx
@@ -13,6 +13,8 @@
     <p:sldId id="263" r:id="rId7"/>
     <p:sldId id="257" r:id="rId8"/>
     <p:sldId id="259" r:id="rId9"/>
+    <p:sldId id="265" r:id="rId10"/>
+    <p:sldId id="266" r:id="rId11"/>
   </p:sldIdLst>
   <p:sldSz cx="12192000" cy="6858000"/>
   <p:notesSz cx="6858000" cy="9144000"/>
@@ -266,7 +268,7 @@
           <a:p>
             <a:fld id="{C179BDB9-17B2-5345-AD1C-D41C6CB17F17}" type="datetimeFigureOut">
               <a:rPr lang="en-US" smtClean="0"/>
-              <a:t>4/26/26</a:t>
+              <a:t>5/3/26</a:t>
             </a:fld>
             <a:endParaRPr lang="en-US"/>
           </a:p>
@@ -464,7 +466,7 @@
           <a:p>
             <a:fld id="{C179BDB9-17B2-5345-AD1C-D41C6CB17F17}" type="datetimeFigureOut">
               <a:rPr lang="en-US" smtClean="0"/>
-              <a:t>4/26/26</a:t>
+              <a:t>5/3/26</a:t>
             </a:fld>
             <a:endParaRPr lang="en-US"/>
           </a:p>
@@ -672,7 +674,7 @@
           <a:p>
             <a:fld id="{C179BDB9-17B2-5345-AD1C-D41C6CB17F17}" type="datetimeFigureOut">
               <a:rPr lang="en-US" smtClean="0"/>
-              <a:t>4/26/26</a:t>
+              <a:t>5/3/26</a:t>
             </a:fld>
             <a:endParaRPr lang="en-US"/>
           </a:p>
@@ -870,7 +872,7 @@
           <a:p>
             <a:fld id="{C179BDB9-17B2-5345-AD1C-D41C6CB17F17}" type="datetimeFigureOut">
               <a:rPr lang="en-US" smtClean="0"/>
-              <a:t>4/26/26</a:t>
+              <a:t>5/3/26</a:t>
             </a:fld>
             <a:endParaRPr lang="en-US"/>
           </a:p>
@@ -1145,7 +1147,7 @@
           <a:p>
             <a:fld id="{C179BDB9-17B2-5345-AD1C-D41C6CB17F17}" type="datetimeFigureOut">
               <a:rPr lang="en-US" smtClean="0"/>
-              <a:t>4/26/26</a:t>
+              <a:t>5/3/26</a:t>
             </a:fld>
             <a:endParaRPr lang="en-US"/>
           </a:p>
@@ -1410,7 +1412,7 @@
           <a:p>
             <a:fld id="{C179BDB9-17B2-5345-AD1C-D41C6CB17F17}" type="datetimeFigureOut">
               <a:rPr lang="en-US" smtClean="0"/>
-              <a:t>4/26/26</a:t>
+              <a:t>5/3/26</a:t>
             </a:fld>
             <a:endParaRPr lang="en-US"/>
           </a:p>
@@ -1822,7 +1824,7 @@
           <a:p>
             <a:fld id="{C179BDB9-17B2-5345-AD1C-D41C6CB17F17}" type="datetimeFigureOut">
               <a:rPr lang="en-US" smtClean="0"/>
-              <a:t>4/26/26</a:t>
+              <a:t>5/3/26</a:t>
             </a:fld>
             <a:endParaRPr lang="en-US"/>
           </a:p>
@@ -1963,7 +1965,7 @@
           <a:p>
             <a:fld id="{C179BDB9-17B2-5345-AD1C-D41C6CB17F17}" type="datetimeFigureOut">
               <a:rPr lang="en-US" smtClean="0"/>
-              <a:t>4/26/26</a:t>
+              <a:t>5/3/26</a:t>
             </a:fld>
             <a:endParaRPr lang="en-US"/>
           </a:p>
@@ -2076,7 +2078,7 @@
           <a:p>
             <a:fld id="{C179BDB9-17B2-5345-AD1C-D41C6CB17F17}" type="datetimeFigureOut">
               <a:rPr lang="en-US" smtClean="0"/>
-              <a:t>4/26/26</a:t>
+              <a:t>5/3/26</a:t>
             </a:fld>
             <a:endParaRPr lang="en-US"/>
           </a:p>
@@ -2387,7 +2389,7 @@
           <a:p>
             <a:fld id="{C179BDB9-17B2-5345-AD1C-D41C6CB17F17}" type="datetimeFigureOut">
               <a:rPr lang="en-US" smtClean="0"/>
-              <a:t>4/26/26</a:t>
+              <a:t>5/3/26</a:t>
             </a:fld>
             <a:endParaRPr lang="en-US"/>
           </a:p>
@@ -2675,7 +2677,7 @@
           <a:p>
             <a:fld id="{C179BDB9-17B2-5345-AD1C-D41C6CB17F17}" type="datetimeFigureOut">
               <a:rPr lang="en-US" smtClean="0"/>
-              <a:t>4/26/26</a:t>
+              <a:t>5/3/26</a:t>
             </a:fld>
             <a:endParaRPr lang="en-US"/>
           </a:p>
@@ -2916,7 +2918,7 @@
           <a:p>
             <a:fld id="{C179BDB9-17B2-5345-AD1C-D41C6CB17F17}" type="datetimeFigureOut">
               <a:rPr lang="en-US" smtClean="0"/>
-              <a:t>4/26/26</a:t>
+              <a:t>5/3/26</a:t>
             </a:fld>
             <a:endParaRPr lang="en-US"/>
           </a:p>
@@ -3622,6 +3624,158 @@
     <p:extLst>
       <p:ext uri="{BB962C8B-B14F-4D97-AF65-F5344CB8AC3E}">
         <p14:creationId xmlns:p14="http://schemas.microsoft.com/office/powerpoint/2010/main" val="4043061871"/>
+      </p:ext>
+    </p:extLst>
+  </p:cSld>
+  <p:clrMapOvr>
+    <a:masterClrMapping/>
+  </p:clrMapOvr>
+</p:sld>
+</file>
+
+<file path=ppt/slides/slide10.xml><?xml version="1.0" encoding="utf-8"?>
+<p:sld xmlns:a="http://schemas.openxmlformats.org/drawingml/2006/main" xmlns:r="http://schemas.openxmlformats.org/officeDocument/2006/relationships" xmlns:p="http://schemas.openxmlformats.org/presentationml/2006/main">
+  <p:cSld>
+    <p:spTree>
+      <p:nvGrpSpPr>
+        <p:cNvPr id="1" name="">
+          <a:extLst>
+            <a:ext uri="{FF2B5EF4-FFF2-40B4-BE49-F238E27FC236}">
+              <a16:creationId xmlns:a16="http://schemas.microsoft.com/office/drawing/2014/main" id="{4D80235D-5502-F91C-48D2-CF1B61644B6D}"/>
+            </a:ext>
+          </a:extLst>
+        </p:cNvPr>
+        <p:cNvGrpSpPr/>
+        <p:nvPr/>
+      </p:nvGrpSpPr>
+      <p:grpSpPr>
+        <a:xfrm>
+          <a:off x="0" y="0"/>
+          <a:ext cx="0" cy="0"/>
+          <a:chOff x="0" y="0"/>
+          <a:chExt cx="0" cy="0"/>
+        </a:xfrm>
+      </p:grpSpPr>
+      <p:pic>
+        <p:nvPicPr>
+          <p:cNvPr id="3" name="Picture 2">
+            <a:extLst>
+              <a:ext uri="{FF2B5EF4-FFF2-40B4-BE49-F238E27FC236}">
+                <a16:creationId xmlns:a16="http://schemas.microsoft.com/office/drawing/2014/main" id="{561D9822-8215-7011-405D-841ABF37A7DA}"/>
+              </a:ext>
+            </a:extLst>
+          </p:cNvPr>
+          <p:cNvPicPr>
+            <a:picLocks noChangeAspect="1"/>
+          </p:cNvPicPr>
+          <p:nvPr/>
+        </p:nvPicPr>
+        <p:blipFill>
+          <a:blip r:embed="rId2"/>
+          <a:srcRect/>
+          <a:stretch/>
+        </p:blipFill>
+        <p:spPr>
+          <a:xfrm>
+            <a:off x="241300" y="1231900"/>
+            <a:ext cx="5854700" cy="4394200"/>
+          </a:xfrm>
+          <a:prstGeom prst="rect">
+            <a:avLst/>
+          </a:prstGeom>
+        </p:spPr>
+      </p:pic>
+      <p:pic>
+        <p:nvPicPr>
+          <p:cNvPr id="2" name="Picture 1">
+            <a:extLst>
+              <a:ext uri="{FF2B5EF4-FFF2-40B4-BE49-F238E27FC236}">
+                <a16:creationId xmlns:a16="http://schemas.microsoft.com/office/drawing/2014/main" id="{988375E1-ED2B-3803-87FE-EAAF71BFF5AB}"/>
+              </a:ext>
+            </a:extLst>
+          </p:cNvPr>
+          <p:cNvPicPr>
+            <a:picLocks noChangeAspect="1"/>
+          </p:cNvPicPr>
+          <p:nvPr/>
+        </p:nvPicPr>
+        <p:blipFill>
+          <a:blip r:embed="rId3"/>
+          <a:srcRect/>
+          <a:stretch/>
+        </p:blipFill>
+        <p:spPr>
+          <a:xfrm rot="16200000">
+            <a:off x="8749426" y="-664242"/>
+            <a:ext cx="1717729" cy="3792282"/>
+          </a:xfrm>
+          <a:prstGeom prst="rect">
+            <a:avLst/>
+          </a:prstGeom>
+        </p:spPr>
+      </p:pic>
+      <p:pic>
+        <p:nvPicPr>
+          <p:cNvPr id="4" name="Picture 3">
+            <a:extLst>
+              <a:ext uri="{FF2B5EF4-FFF2-40B4-BE49-F238E27FC236}">
+                <a16:creationId xmlns:a16="http://schemas.microsoft.com/office/drawing/2014/main" id="{9E770833-B897-B2D9-2F83-BE8A975D8A76}"/>
+              </a:ext>
+            </a:extLst>
+          </p:cNvPr>
+          <p:cNvPicPr>
+            <a:picLocks noChangeAspect="1"/>
+          </p:cNvPicPr>
+          <p:nvPr/>
+        </p:nvPicPr>
+        <p:blipFill>
+          <a:blip r:embed="rId4"/>
+          <a:srcRect/>
+          <a:stretch/>
+        </p:blipFill>
+        <p:spPr>
+          <a:xfrm rot="16200000">
+            <a:off x="8749425" y="1653462"/>
+            <a:ext cx="1717729" cy="3551074"/>
+          </a:xfrm>
+          <a:prstGeom prst="rect">
+            <a:avLst/>
+          </a:prstGeom>
+        </p:spPr>
+      </p:pic>
+      <p:pic>
+        <p:nvPicPr>
+          <p:cNvPr id="5" name="Picture 4">
+            <a:extLst>
+              <a:ext uri="{FF2B5EF4-FFF2-40B4-BE49-F238E27FC236}">
+                <a16:creationId xmlns:a16="http://schemas.microsoft.com/office/drawing/2014/main" id="{EC7123F2-39CC-3E01-BF03-368C61B0F875}"/>
+              </a:ext>
+            </a:extLst>
+          </p:cNvPr>
+          <p:cNvPicPr>
+            <a:picLocks noChangeAspect="1"/>
+          </p:cNvPicPr>
+          <p:nvPr/>
+        </p:nvPicPr>
+        <p:blipFill>
+          <a:blip r:embed="rId5"/>
+          <a:srcRect/>
+          <a:stretch/>
+        </p:blipFill>
+        <p:spPr>
+          <a:xfrm rot="16200000">
+            <a:off x="8749425" y="3850564"/>
+            <a:ext cx="1717729" cy="3551074"/>
+          </a:xfrm>
+          <a:prstGeom prst="rect">
+            <a:avLst/>
+          </a:prstGeom>
+        </p:spPr>
+      </p:pic>
+    </p:spTree>
+    <p:extLst>
+      <p:ext uri="{BB962C8B-B14F-4D97-AF65-F5344CB8AC3E}">
+        <p14:creationId xmlns:p14="http://schemas.microsoft.com/office/powerpoint/2010/main" val="1416650235"/>
       </p:ext>
     </p:extLst>
   </p:cSld>
@@ -6421,10 +6575,280 @@
           <a:chExt cx="0" cy="0"/>
         </a:xfrm>
       </p:grpSpPr>
+      <p:pic>
+        <p:nvPicPr>
+          <p:cNvPr id="3" name="Picture 2">
+            <a:extLst>
+              <a:ext uri="{FF2B5EF4-FFF2-40B4-BE49-F238E27FC236}">
+                <a16:creationId xmlns:a16="http://schemas.microsoft.com/office/drawing/2014/main" id="{C34F0E41-7571-614E-5349-3D461B299A28}"/>
+              </a:ext>
+            </a:extLst>
+          </p:cNvPr>
+          <p:cNvPicPr>
+            <a:picLocks noChangeAspect="1"/>
+          </p:cNvPicPr>
+          <p:nvPr/>
+        </p:nvPicPr>
+        <p:blipFill>
+          <a:blip r:embed="rId2"/>
+          <a:stretch>
+            <a:fillRect/>
+          </a:stretch>
+        </p:blipFill>
+        <p:spPr>
+          <a:xfrm>
+            <a:off x="541375" y="1112678"/>
+            <a:ext cx="5854700" cy="4394200"/>
+          </a:xfrm>
+          <a:prstGeom prst="rect">
+            <a:avLst/>
+          </a:prstGeom>
+        </p:spPr>
+      </p:pic>
+      <p:pic>
+        <p:nvPicPr>
+          <p:cNvPr id="7" name="Picture 6">
+            <a:extLst>
+              <a:ext uri="{FF2B5EF4-FFF2-40B4-BE49-F238E27FC236}">
+                <a16:creationId xmlns:a16="http://schemas.microsoft.com/office/drawing/2014/main" id="{F2950F29-273F-0B47-3F73-F63B12BBCDA6}"/>
+              </a:ext>
+            </a:extLst>
+          </p:cNvPr>
+          <p:cNvPicPr>
+            <a:picLocks noChangeAspect="1"/>
+          </p:cNvPicPr>
+          <p:nvPr/>
+        </p:nvPicPr>
+        <p:blipFill>
+          <a:blip r:embed="rId3"/>
+          <a:stretch>
+            <a:fillRect/>
+          </a:stretch>
+        </p:blipFill>
+        <p:spPr>
+          <a:xfrm rot="16200000">
+            <a:off x="8165082" y="-230827"/>
+            <a:ext cx="2182826" cy="2687011"/>
+          </a:xfrm>
+          <a:prstGeom prst="rect">
+            <a:avLst/>
+          </a:prstGeom>
+        </p:spPr>
+      </p:pic>
+      <p:pic>
+        <p:nvPicPr>
+          <p:cNvPr id="8" name="Picture 7">
+            <a:extLst>
+              <a:ext uri="{FF2B5EF4-FFF2-40B4-BE49-F238E27FC236}">
+                <a16:creationId xmlns:a16="http://schemas.microsoft.com/office/drawing/2014/main" id="{835E26EA-72BB-C7DD-B0F9-DB48109810DA}"/>
+              </a:ext>
+            </a:extLst>
+          </p:cNvPr>
+          <p:cNvPicPr>
+            <a:picLocks noChangeAspect="1"/>
+          </p:cNvPicPr>
+          <p:nvPr/>
+        </p:nvPicPr>
+        <p:blipFill>
+          <a:blip r:embed="rId4"/>
+          <a:srcRect/>
+          <a:stretch/>
+        </p:blipFill>
+        <p:spPr>
+          <a:xfrm rot="16200000">
+            <a:off x="8122553" y="2160508"/>
+            <a:ext cx="2182828" cy="2687015"/>
+          </a:xfrm>
+          <a:prstGeom prst="rect">
+            <a:avLst/>
+          </a:prstGeom>
+        </p:spPr>
+      </p:pic>
+      <p:pic>
+        <p:nvPicPr>
+          <p:cNvPr id="9" name="Picture 8">
+            <a:extLst>
+              <a:ext uri="{FF2B5EF4-FFF2-40B4-BE49-F238E27FC236}">
+                <a16:creationId xmlns:a16="http://schemas.microsoft.com/office/drawing/2014/main" id="{55C6D8F4-34F0-8757-9844-907093805A78}"/>
+              </a:ext>
+            </a:extLst>
+          </p:cNvPr>
+          <p:cNvPicPr>
+            <a:picLocks noChangeAspect="1"/>
+          </p:cNvPicPr>
+          <p:nvPr/>
+        </p:nvPicPr>
+        <p:blipFill>
+          <a:blip r:embed="rId5"/>
+          <a:srcRect/>
+          <a:stretch/>
+        </p:blipFill>
+        <p:spPr>
+          <a:xfrm rot="16200000">
+            <a:off x="8122552" y="4444445"/>
+            <a:ext cx="2182826" cy="2687012"/>
+          </a:xfrm>
+          <a:prstGeom prst="rect">
+            <a:avLst/>
+          </a:prstGeom>
+        </p:spPr>
+      </p:pic>
     </p:spTree>
     <p:extLst>
       <p:ext uri="{BB962C8B-B14F-4D97-AF65-F5344CB8AC3E}">
         <p14:creationId xmlns:p14="http://schemas.microsoft.com/office/powerpoint/2010/main" val="1473110578"/>
+      </p:ext>
+    </p:extLst>
+  </p:cSld>
+  <p:clrMapOvr>
+    <a:masterClrMapping/>
+  </p:clrMapOvr>
+</p:sld>
+</file>
+
+<file path=ppt/slides/slide9.xml><?xml version="1.0" encoding="utf-8"?>
+<p:sld xmlns:a="http://schemas.openxmlformats.org/drawingml/2006/main" xmlns:r="http://schemas.openxmlformats.org/officeDocument/2006/relationships" xmlns:p="http://schemas.openxmlformats.org/presentationml/2006/main">
+  <p:cSld>
+    <p:spTree>
+      <p:nvGrpSpPr>
+        <p:cNvPr id="1" name="">
+          <a:extLst>
+            <a:ext uri="{FF2B5EF4-FFF2-40B4-BE49-F238E27FC236}">
+              <a16:creationId xmlns:a16="http://schemas.microsoft.com/office/drawing/2014/main" id="{0B317031-EDC7-DF80-6D7A-B18F855F4D77}"/>
+            </a:ext>
+          </a:extLst>
+        </p:cNvPr>
+        <p:cNvGrpSpPr/>
+        <p:nvPr/>
+      </p:nvGrpSpPr>
+      <p:grpSpPr>
+        <a:xfrm>
+          <a:off x="0" y="0"/>
+          <a:ext cx="0" cy="0"/>
+          <a:chOff x="0" y="0"/>
+          <a:chExt cx="0" cy="0"/>
+        </a:xfrm>
+      </p:grpSpPr>
+      <p:pic>
+        <p:nvPicPr>
+          <p:cNvPr id="2" name="Picture 1">
+            <a:extLst>
+              <a:ext uri="{FF2B5EF4-FFF2-40B4-BE49-F238E27FC236}">
+                <a16:creationId xmlns:a16="http://schemas.microsoft.com/office/drawing/2014/main" id="{B5C564B7-F17B-3CD9-4482-C153193F9897}"/>
+              </a:ext>
+            </a:extLst>
+          </p:cNvPr>
+          <p:cNvPicPr>
+            <a:picLocks noChangeAspect="1"/>
+          </p:cNvPicPr>
+          <p:nvPr/>
+        </p:nvPicPr>
+        <p:blipFill>
+          <a:blip r:embed="rId2"/>
+          <a:srcRect/>
+          <a:stretch/>
+        </p:blipFill>
+        <p:spPr>
+          <a:xfrm rot="16200000">
+            <a:off x="8682652" y="4371643"/>
+            <a:ext cx="2213141" cy="2743200"/>
+          </a:xfrm>
+          <a:prstGeom prst="rect">
+            <a:avLst/>
+          </a:prstGeom>
+        </p:spPr>
+      </p:pic>
+      <p:pic>
+        <p:nvPicPr>
+          <p:cNvPr id="6" name="Picture 5">
+            <a:extLst>
+              <a:ext uri="{FF2B5EF4-FFF2-40B4-BE49-F238E27FC236}">
+                <a16:creationId xmlns:a16="http://schemas.microsoft.com/office/drawing/2014/main" id="{B5D0943A-707D-2A50-8AD7-3AE4F7D889B8}"/>
+              </a:ext>
+            </a:extLst>
+          </p:cNvPr>
+          <p:cNvPicPr>
+            <a:picLocks noChangeAspect="1"/>
+          </p:cNvPicPr>
+          <p:nvPr/>
+        </p:nvPicPr>
+        <p:blipFill>
+          <a:blip r:embed="rId3"/>
+          <a:srcRect/>
+          <a:stretch/>
+        </p:blipFill>
+        <p:spPr>
+          <a:xfrm>
+            <a:off x="0" y="1231900"/>
+            <a:ext cx="5854700" cy="4394200"/>
+          </a:xfrm>
+          <a:prstGeom prst="rect">
+            <a:avLst/>
+          </a:prstGeom>
+        </p:spPr>
+      </p:pic>
+      <p:pic>
+        <p:nvPicPr>
+          <p:cNvPr id="7" name="Picture 6">
+            <a:extLst>
+              <a:ext uri="{FF2B5EF4-FFF2-40B4-BE49-F238E27FC236}">
+                <a16:creationId xmlns:a16="http://schemas.microsoft.com/office/drawing/2014/main" id="{A90F9AC9-8825-B29C-548B-7A2FCAA95FF0}"/>
+              </a:ext>
+            </a:extLst>
+          </p:cNvPr>
+          <p:cNvPicPr>
+            <a:picLocks noChangeAspect="1"/>
+          </p:cNvPicPr>
+          <p:nvPr/>
+        </p:nvPicPr>
+        <p:blipFill>
+          <a:blip r:embed="rId4"/>
+          <a:srcRect/>
+          <a:stretch/>
+        </p:blipFill>
+        <p:spPr>
+          <a:xfrm rot="16200000">
+            <a:off x="8627381" y="2090297"/>
+            <a:ext cx="2213141" cy="2666959"/>
+          </a:xfrm>
+          <a:prstGeom prst="rect">
+            <a:avLst/>
+          </a:prstGeom>
+        </p:spPr>
+      </p:pic>
+      <p:pic>
+        <p:nvPicPr>
+          <p:cNvPr id="8" name="Picture 7">
+            <a:extLst>
+              <a:ext uri="{FF2B5EF4-FFF2-40B4-BE49-F238E27FC236}">
+                <a16:creationId xmlns:a16="http://schemas.microsoft.com/office/drawing/2014/main" id="{E6F7C02C-4C6B-2275-0BA2-BF27072BABCD}"/>
+              </a:ext>
+            </a:extLst>
+          </p:cNvPr>
+          <p:cNvPicPr>
+            <a:picLocks noChangeAspect="1"/>
+          </p:cNvPicPr>
+          <p:nvPr/>
+        </p:nvPicPr>
+        <p:blipFill>
+          <a:blip r:embed="rId5"/>
+          <a:srcRect/>
+          <a:stretch/>
+        </p:blipFill>
+        <p:spPr>
+          <a:xfrm rot="16200000">
+            <a:off x="8682653" y="-207905"/>
+            <a:ext cx="2213141" cy="2666959"/>
+          </a:xfrm>
+          <a:prstGeom prst="rect">
+            <a:avLst/>
+          </a:prstGeom>
+        </p:spPr>
+      </p:pic>
+    </p:spTree>
+    <p:extLst>
+      <p:ext uri="{BB962C8B-B14F-4D97-AF65-F5344CB8AC3E}">
+        <p14:creationId xmlns:p14="http://schemas.microsoft.com/office/powerpoint/2010/main" val="892467209"/>
       </p:ext>
     </p:extLst>
   </p:cSld>

--- a/nbr_composite_figures.pptx
+++ b/nbr_composite_figures.pptx
@@ -3677,8 +3677,8 @@
         </p:blipFill>
         <p:spPr>
           <a:xfrm>
-            <a:off x="241300" y="1231900"/>
-            <a:ext cx="5854700" cy="4394200"/>
+            <a:off x="0" y="17929"/>
+            <a:ext cx="8204427" cy="6157769"/>
           </a:xfrm>
           <a:prstGeom prst="rect">
             <a:avLst/>
@@ -3695,7 +3695,7 @@
             </a:extLst>
           </p:cNvPr>
           <p:cNvPicPr>
-            <a:picLocks noChangeAspect="1"/>
+            <a:picLocks/>
           </p:cNvPicPr>
           <p:nvPr/>
         </p:nvPicPr>
@@ -3706,12 +3706,19 @@
         </p:blipFill>
         <p:spPr>
           <a:xfrm rot="16200000">
-            <a:off x="8749426" y="-664242"/>
-            <a:ext cx="1717729" cy="3792282"/>
+            <a:off x="8828011" y="-909547"/>
+            <a:ext cx="1993392" cy="4114800"/>
           </a:xfrm>
           <a:prstGeom prst="rect">
             <a:avLst/>
           </a:prstGeom>
+          <a:ln w="76200">
+            <a:solidFill>
+              <a:schemeClr val="accent5">
+                <a:lumMod val="75000"/>
+              </a:schemeClr>
+            </a:solidFill>
+          </a:ln>
         </p:spPr>
       </p:pic>
       <p:pic>
@@ -3735,12 +3742,20 @@
         </p:blipFill>
         <p:spPr>
           <a:xfrm rot="16200000">
-            <a:off x="8749425" y="1653462"/>
-            <a:ext cx="1717729" cy="3551074"/>
+            <a:off x="8829500" y="1284186"/>
+            <a:ext cx="1990413" cy="4114800"/>
           </a:xfrm>
           <a:prstGeom prst="rect">
             <a:avLst/>
           </a:prstGeom>
+          <a:ln w="76200">
+            <a:solidFill>
+              <a:schemeClr val="accent5">
+                <a:lumMod val="20000"/>
+                <a:lumOff val="80000"/>
+              </a:schemeClr>
+            </a:solidFill>
+          </a:ln>
         </p:spPr>
       </p:pic>
       <p:pic>
@@ -3764,12 +3779,20 @@
         </p:blipFill>
         <p:spPr>
           <a:xfrm rot="16200000">
-            <a:off x="8749425" y="3850564"/>
-            <a:ext cx="1717729" cy="3551074"/>
+            <a:off x="8859085" y="3522006"/>
+            <a:ext cx="1990414" cy="4114800"/>
           </a:xfrm>
           <a:prstGeom prst="rect">
             <a:avLst/>
           </a:prstGeom>
+          <a:ln w="76200">
+            <a:solidFill>
+              <a:schemeClr val="accent5">
+                <a:lumMod val="20000"/>
+                <a:lumOff val="80000"/>
+              </a:schemeClr>
+            </a:solidFill>
+          </a:ln>
         </p:spPr>
       </p:pic>
     </p:spTree>
@@ -6597,8 +6620,8 @@
         </p:blipFill>
         <p:spPr>
           <a:xfrm>
-            <a:off x="541375" y="1112678"/>
-            <a:ext cx="5854700" cy="4394200"/>
+            <a:off x="0" y="125688"/>
+            <a:ext cx="8175562" cy="6136105"/>
           </a:xfrm>
           <a:prstGeom prst="rect">
             <a:avLst/>
@@ -6627,12 +6650,17 @@
         </p:blipFill>
         <p:spPr>
           <a:xfrm rot="16200000">
-            <a:off x="8165082" y="-230827"/>
-            <a:ext cx="2182826" cy="2687011"/>
+            <a:off x="8153197" y="-113349"/>
+            <a:ext cx="2079907" cy="2560320"/>
           </a:xfrm>
           <a:prstGeom prst="rect">
             <a:avLst/>
           </a:prstGeom>
+          <a:ln w="76200">
+            <a:solidFill>
+              <a:schemeClr val="accent5"/>
+            </a:solidFill>
+          </a:ln>
         </p:spPr>
       </p:pic>
       <p:pic>
@@ -6656,12 +6684,20 @@
         </p:blipFill>
         <p:spPr>
           <a:xfrm rot="16200000">
-            <a:off x="8122553" y="2160508"/>
-            <a:ext cx="2182828" cy="2687015"/>
+            <a:off x="8161467" y="2155001"/>
+            <a:ext cx="2079906" cy="2560320"/>
           </a:xfrm>
           <a:prstGeom prst="rect">
             <a:avLst/>
           </a:prstGeom>
+          <a:ln w="76200">
+            <a:solidFill>
+              <a:schemeClr val="accent5">
+                <a:lumMod val="40000"/>
+                <a:lumOff val="60000"/>
+              </a:schemeClr>
+            </a:solidFill>
+          </a:ln>
         </p:spPr>
       </p:pic>
       <p:pic>
@@ -6685,12 +6721,20 @@
         </p:blipFill>
         <p:spPr>
           <a:xfrm rot="16200000">
-            <a:off x="8122552" y="4444445"/>
-            <a:ext cx="2182826" cy="2687012"/>
+            <a:off x="8161466" y="4412198"/>
+            <a:ext cx="2079907" cy="2560320"/>
           </a:xfrm>
           <a:prstGeom prst="rect">
             <a:avLst/>
           </a:prstGeom>
+          <a:ln w="76200">
+            <a:solidFill>
+              <a:schemeClr val="accent5">
+                <a:lumMod val="40000"/>
+                <a:lumOff val="60000"/>
+              </a:schemeClr>
+            </a:solidFill>
+          </a:ln>
         </p:spPr>
       </p:pic>
     </p:spTree>
@@ -6750,12 +6794,20 @@
         </p:blipFill>
         <p:spPr>
           <a:xfrm rot="16200000">
-            <a:off x="8682652" y="4371643"/>
-            <a:ext cx="2213141" cy="2743200"/>
+            <a:off x="8790486" y="4447208"/>
+            <a:ext cx="2065599" cy="2560320"/>
           </a:xfrm>
           <a:prstGeom prst="rect">
             <a:avLst/>
           </a:prstGeom>
+          <a:ln w="76200">
+            <a:solidFill>
+              <a:schemeClr val="accent5">
+                <a:lumMod val="40000"/>
+                <a:lumOff val="60000"/>
+              </a:schemeClr>
+            </a:solidFill>
+          </a:ln>
         </p:spPr>
       </p:pic>
       <p:pic>
@@ -6779,8 +6831,8 @@
         </p:blipFill>
         <p:spPr>
           <a:xfrm>
-            <a:off x="0" y="1231900"/>
-            <a:ext cx="5854700" cy="4394200"/>
+            <a:off x="0" y="250579"/>
+            <a:ext cx="8455744" cy="6346394"/>
           </a:xfrm>
           <a:prstGeom prst="rect">
             <a:avLst/>
@@ -6808,12 +6860,20 @@
         </p:blipFill>
         <p:spPr>
           <a:xfrm rot="16200000">
-            <a:off x="8627381" y="2090297"/>
-            <a:ext cx="2213141" cy="2666959"/>
+            <a:off x="8761740" y="2187862"/>
+            <a:ext cx="2124648" cy="2560320"/>
           </a:xfrm>
           <a:prstGeom prst="rect">
             <a:avLst/>
           </a:prstGeom>
+          <a:ln w="76200">
+            <a:solidFill>
+              <a:schemeClr val="accent5">
+                <a:lumMod val="40000"/>
+                <a:lumOff val="60000"/>
+              </a:schemeClr>
+            </a:solidFill>
+          </a:ln>
         </p:spPr>
       </p:pic>
       <p:pic>
@@ -6837,12 +6897,20 @@
         </p:blipFill>
         <p:spPr>
           <a:xfrm rot="16200000">
-            <a:off x="8682653" y="-207905"/>
-            <a:ext cx="2213141" cy="2666959"/>
+            <a:off x="8763225" y="-110340"/>
+            <a:ext cx="2124648" cy="2560320"/>
           </a:xfrm>
           <a:prstGeom prst="rect">
             <a:avLst/>
           </a:prstGeom>
+          <a:ln w="76200">
+            <a:solidFill>
+              <a:schemeClr val="accent5">
+                <a:lumMod val="60000"/>
+                <a:lumOff val="40000"/>
+              </a:schemeClr>
+            </a:solidFill>
+          </a:ln>
         </p:spPr>
       </p:pic>
     </p:spTree>
